--- a/Geladeira-Aberta-apresentacao.pptx
+++ b/Geladeira-Aberta-apresentacao.pptx
@@ -685,7 +685,7 @@
           <a:p>
             <a:r>
               <a:rPr lang="en-US" dirty="0"/>
-              <a:t>Roberto. Mostrar os dois endpoints. Comentar que a chave fica em config.js e não vai para o GitHub.</a:t>
+              <a:t>Roberto. Mostrar os dois endpoints. Comentar que a chave fica em config.js.</a:t>
             </a:r>
             <a:endParaRPr lang="en-US" dirty="0"/>
           </a:p>
@@ -1037,7 +1037,7 @@
           <a:p>
             <a:r>
               <a:rPr lang="en-US" dirty="0"/>
-              <a:t>REPOSITÓRIO (1 min) – Roberto. Abrir o README no GitHub e mostrar as seções. Comentar que a chave fica no .gitignore. Trocar o link do slide pelo link real antes de apresentar.</a:t>
+              <a:t>REPOSITÓRIO (1 min) – Roberto. Abrir o README no GitHub e mostrar as seções.</a:t>
             </a:r>
             <a:endParaRPr lang="en-US" dirty="0"/>
           </a:p>
@@ -4113,7 +4113,7 @@
                 <a:ea typeface="Calibri" pitchFamily="34" charset="-122"/>
                 <a:cs typeface="Calibri" pitchFamily="34" charset="-120"/>
               </a:rPr>
-              <a:t>Chave da API, fora do GitHub</a:t>
+              <a:t>Configuração com a chave da API</a:t>
             </a:r>
             <a:endParaRPr lang="en-US" sz="1500" dirty="0"/>
           </a:p>
@@ -5948,7 +5948,7 @@
         <p:spPr>
           <a:xfrm>
             <a:off x="914400" y="1828800"/>
-            <a:ext cx="4572000" cy="3383280"/>
+            <a:ext cx="4754880" cy="3383280"/>
           </a:xfrm>
           <a:prstGeom prst="rect">
             <a:avLst/>
@@ -5967,7 +5967,7 @@
               <a:buNone/>
             </a:pPr>
             <a:r>
-              <a:rPr lang="en-US" sz="1600" dirty="0">
+              <a:rPr lang="en-US" sz="1500" dirty="0">
                 <a:solidFill>
                   <a:srgbClr val="FCF1D0"/>
                 </a:solidFill>
@@ -5975,9 +5975,9 @@
                 <a:ea typeface="Courier New" pitchFamily="34" charset="-122"/>
                 <a:cs typeface="Courier New" pitchFamily="34" charset="-120"/>
               </a:rPr>
-              <a:t>geladeira-receitas/</a:t>
-            </a:r>
-            <a:endParaRPr lang="en-US" sz="1600" dirty="0"/>
+              <a:t>SpoonacularAPI-ProgInt/</a:t>
+            </a:r>
+            <a:endParaRPr lang="en-US" sz="1500" dirty="0"/>
           </a:p>
           <a:p>
             <a:pPr indent="0" marL="0">
@@ -5987,7 +5987,7 @@
               <a:buNone/>
             </a:pPr>
             <a:r>
-              <a:rPr lang="en-US" sz="1600" dirty="0">
+              <a:rPr lang="en-US" sz="1500" dirty="0">
                 <a:solidFill>
                   <a:srgbClr val="FCF1D0"/>
                 </a:solidFill>
@@ -5997,7 +5997,7 @@
               </a:rPr>
               <a:t>├── index.html</a:t>
             </a:r>
-            <a:endParaRPr lang="en-US" sz="1600" dirty="0"/>
+            <a:endParaRPr lang="en-US" sz="1500" dirty="0"/>
           </a:p>
           <a:p>
             <a:pPr indent="0" marL="0">
@@ -6007,7 +6007,7 @@
               <a:buNone/>
             </a:pPr>
             <a:r>
-              <a:rPr lang="en-US" sz="1600" dirty="0">
+              <a:rPr lang="en-US" sz="1500" dirty="0">
                 <a:solidFill>
                   <a:srgbClr val="FCF1D0"/>
                 </a:solidFill>
@@ -6017,7 +6017,7 @@
               </a:rPr>
               <a:t>├── style.css</a:t>
             </a:r>
-            <a:endParaRPr lang="en-US" sz="1600" dirty="0"/>
+            <a:endParaRPr lang="en-US" sz="1500" dirty="0"/>
           </a:p>
           <a:p>
             <a:pPr indent="0" marL="0">
@@ -6027,7 +6027,7 @@
               <a:buNone/>
             </a:pPr>
             <a:r>
-              <a:rPr lang="en-US" sz="1600" dirty="0">
+              <a:rPr lang="en-US" sz="1500" dirty="0">
                 <a:solidFill>
                   <a:srgbClr val="FCF1D0"/>
                 </a:solidFill>
@@ -6037,7 +6037,7 @@
               </a:rPr>
               <a:t>├── script.js</a:t>
             </a:r>
-            <a:endParaRPr lang="en-US" sz="1600" dirty="0"/>
+            <a:endParaRPr lang="en-US" sz="1500" dirty="0"/>
           </a:p>
           <a:p>
             <a:pPr indent="0" marL="0">
@@ -6047,7 +6047,7 @@
               <a:buNone/>
             </a:pPr>
             <a:r>
-              <a:rPr lang="en-US" sz="1600" dirty="0">
+              <a:rPr lang="en-US" sz="1500" dirty="0">
                 <a:solidFill>
                   <a:srgbClr val="FCF1D0"/>
                 </a:solidFill>
@@ -6055,9 +6055,9 @@
                 <a:ea typeface="Courier New" pitchFamily="34" charset="-122"/>
                 <a:cs typeface="Courier New" pitchFamily="34" charset="-120"/>
               </a:rPr>
-              <a:t>├── config.example.js</a:t>
-            </a:r>
-            <a:endParaRPr lang="en-US" sz="1600" dirty="0"/>
+              <a:t>├── config.js</a:t>
+            </a:r>
+            <a:endParaRPr lang="en-US" sz="1500" dirty="0"/>
           </a:p>
           <a:p>
             <a:pPr indent="0" marL="0">
@@ -6067,7 +6067,7 @@
               <a:buNone/>
             </a:pPr>
             <a:r>
-              <a:rPr lang="en-US" sz="1600" dirty="0">
+              <a:rPr lang="en-US" sz="1500" dirty="0">
                 <a:solidFill>
                   <a:srgbClr val="FCF1D0"/>
                 </a:solidFill>
@@ -6075,9 +6075,9 @@
                 <a:ea typeface="Courier New" pitchFamily="34" charset="-122"/>
                 <a:cs typeface="Courier New" pitchFamily="34" charset="-120"/>
               </a:rPr>
-              <a:t>├── config.js  (ignorado)</a:t>
-            </a:r>
-            <a:endParaRPr lang="en-US" sz="1600" dirty="0"/>
+              <a:t>├── README.md</a:t>
+            </a:r>
+            <a:endParaRPr lang="en-US" sz="1500" dirty="0"/>
           </a:p>
           <a:p>
             <a:pPr indent="0" marL="0">
@@ -6087,7 +6087,7 @@
               <a:buNone/>
             </a:pPr>
             <a:r>
-              <a:rPr lang="en-US" sz="1600" dirty="0">
+              <a:rPr lang="en-US" sz="1500" dirty="0">
                 <a:solidFill>
                   <a:srgbClr val="FCF1D0"/>
                 </a:solidFill>
@@ -6095,29 +6095,9 @@
                 <a:ea typeface="Courier New" pitchFamily="34" charset="-122"/>
                 <a:cs typeface="Courier New" pitchFamily="34" charset="-120"/>
               </a:rPr>
-              <a:t>├── .gitignore</a:t>
-            </a:r>
-            <a:endParaRPr lang="en-US" sz="1600" dirty="0"/>
-          </a:p>
-          <a:p>
-            <a:pPr indent="0" marL="0">
-              <a:spcAft>
-                <a:spcPts val="600"/>
-              </a:spcAft>
-              <a:buNone/>
-            </a:pPr>
-            <a:r>
-              <a:rPr lang="en-US" sz="1600" dirty="0">
-                <a:solidFill>
-                  <a:srgbClr val="FCF1D0"/>
-                </a:solidFill>
-                <a:latin typeface="Courier New" pitchFamily="34" charset="0"/>
-                <a:ea typeface="Courier New" pitchFamily="34" charset="-122"/>
-                <a:cs typeface="Courier New" pitchFamily="34" charset="-120"/>
-              </a:rPr>
-              <a:t>└── README.md</a:t>
-            </a:r>
-            <a:endParaRPr lang="en-US" sz="1600" dirty="0"/>
+              <a:t>└── Geladeira-Aberta-apresentacao.pptx</a:t>
+            </a:r>
+            <a:endParaRPr lang="en-US" sz="1500" dirty="0"/>
           </a:p>
         </p:txBody>
       </p:sp>
@@ -6625,15 +6605,22 @@
               <a:buNone/>
             </a:pPr>
             <a:r>
-              <a:rPr lang="en-US" sz="1800" b="1" dirty="0">
+              <a:rPr lang="en-US" sz="1800" b="1" u="sng" dirty="0">
                 <a:solidFill>
                   <a:srgbClr val="22396F"/>
                 </a:solidFill>
                 <a:latin typeface="Courier New" pitchFamily="34" charset="0"/>
                 <a:ea typeface="Courier New" pitchFamily="34" charset="-122"/>
                 <a:cs typeface="Courier New" pitchFamily="34" charset="-120"/>
-              </a:rPr>
-              <a:t>github.com/SEU-USUARIO/geladeira-receitas</a:t>
+                <a:hlinkClick r:id="rId6" invalidUrl="" action="" tgtFrame="" tooltip="" history="1" highlightClick="0" endSnd="0">
+                  <a:extLst>
+                    <a:ext uri="{A12FA001-AC4F-418D-AE19-62706E023703}">
+                      <ahyp:hlinkClr xmlns:ahyp="http://schemas.microsoft.com/office/drawing/2018/hyperlinkcolor" val="tx"/>
+                    </a:ext>
+                  </a:extLst>
+                </a:hlinkClick>
+              </a:rPr>
+              <a:t>github.com/RobertoBrittes/SpoonacularAPI-ProgInt</a:t>
             </a:r>
             <a:endParaRPr lang="en-US" sz="1800" dirty="0"/>
           </a:p>

--- a/Geladeira-Aberta-apresentacao.pptx
+++ b/Geladeira-Aberta-apresentacao.pptx
@@ -12,10 +12,9 @@
     <p:sldId id="260" r:id="rId6"/>
     <p:sldId id="261" r:id="rId7"/>
     <p:sldId id="262" r:id="rId8"/>
-    <p:sldId id="263" r:id="rId9"/>
   </p:sldIdLst>
   <p:notesMasterIdLst>
-    <p:notesMasterId r:id="rId10"/>
+    <p:notesMasterId r:id="rId9"/>
   </p:notesMasterIdLst>
   <p:sldSz cx="12192000" cy="6858000"/>
   <p:notesSz cx="6858000" cy="12192000"/>
@@ -773,7 +772,7 @@
           <a:p>
             <a:r>
               <a:rPr lang="en-US" dirty="0"/>
-              <a:t>EXPLICAÇÃO TÉCNICA (4 min) – Saulo começa aqui. Explicar o caminho: usuário → evento → request() → API → render. Depois citar os 4 arquivos.</a:t>
+              <a:t>EXPLICAÇÃO TÉCNICA (4 min) – Saulo começa aqui. Abrir script.js na seção 2. Mostrar que TODAS as chamadas passam por request(). Explicar await, o timeout com AbortController e o finally que limpa o timer. Mencionar o console.error que mostra o erro real.</a:t>
             </a:r>
             <a:endParaRPr lang="en-US" dirty="0"/>
           </a:p>
@@ -861,7 +860,7 @@
           <a:p>
             <a:r>
               <a:rPr lang="en-US" dirty="0"/>
-              <a:t>Saulo. Abrir script.js na seção 2. Mostrar que TODAS as chamadas passam por request(). Explicar await, o timeout com AbortController e o finally que limpa o timer. Mencionar o console.error que mostra o erro real.</a:t>
+              <a:t>Saulo. Seções 3 e 4 do script.js. DOM: h() + textContent + replaceChildren. Eventos: mostrar os addEventListener. Escopo: state e el no topo, requestId para evitar que uma resposta antiga sobrescreva a nova.</a:t>
             </a:r>
             <a:endParaRPr lang="en-US" dirty="0"/>
           </a:p>
@@ -949,7 +948,7 @@
           <a:p>
             <a:r>
               <a:rPr lang="en-US" dirty="0"/>
-              <a:t>Saulo. Seções 3 e 4 do script.js. DOM: h() + textContent + replaceChildren. Eventos: mostrar os addEventListener. Escopo: state e el no topo, requestId para evitar que uma resposta antiga sobrescreva a nova.</a:t>
+              <a:t>REPOSITÓRIO (1 min) – Roberto. Abrir o README no GitHub e mostrar as seções.</a:t>
             </a:r>
             <a:endParaRPr lang="en-US" dirty="0"/>
           </a:p>
@@ -1037,7 +1036,7 @@
           <a:p>
             <a:r>
               <a:rPr lang="en-US" dirty="0"/>
-              <a:t>REPOSITÓRIO (1 min) – Roberto. Abrir o README no GitHub e mostrar as seções.</a:t>
+              <a:t>Encerramento. Agradecer e abrir para perguntas. Todos os integrantes devem estar preparados para responder sobre qualquer parte do código.</a:t>
             </a:r>
             <a:endParaRPr lang="en-US" dirty="0"/>
           </a:p>
@@ -1061,94 +1060,6 @@
             <a:fld id="{F7021451-1387-4CA6-816F-3879F97B5CBC}" type="slidenum">
               <a:rPr lang="en-US"/>
               <a:t>7</a:t>
-            </a:fld>
-            <a:endParaRPr lang="en-US"/>
-          </a:p>
-        </p:txBody>
-      </p:sp>
-    </p:spTree>
-    <p:extLst>
-      <p:ext uri="{BB962C8B-B14F-4D97-AF65-F5344CB8AC3E}">
-        <p14:creationId xmlns:p14="http://schemas.microsoft.com/office/powerpoint/2010/main" val="1024086991"/>
-      </p:ext>
-    </p:extLst>
-  </p:cSld>
-  <p:clrMapOvr>
-    <a:masterClrMapping/>
-  </p:clrMapOvr>
-</p:notes>
-</file>
-
-<file path=ppt/notesSlides/notesSlide8.xml><?xml version="1.0" encoding="utf-8"?>
-<p:notes xmlns:a="http://schemas.openxmlformats.org/drawingml/2006/main" xmlns:r="http://schemas.openxmlformats.org/officeDocument/2006/relationships" xmlns:p="http://schemas.openxmlformats.org/presentationml/2006/main">
-  <p:cSld>
-    <p:spTree>
-      <p:nvGrpSpPr>
-        <p:cNvPr id="1" name=""/>
-        <p:cNvGrpSpPr/>
-        <p:nvPr/>
-      </p:nvGrpSpPr>
-      <p:grpSpPr>
-        <a:xfrm>
-          <a:off x="0" y="0"/>
-          <a:ext cx="0" cy="0"/>
-          <a:chOff x="0" y="0"/>
-          <a:chExt cx="0" cy="0"/>
-        </a:xfrm>
-      </p:grpSpPr>
-      <p:sp>
-        <p:nvSpPr>
-          <p:cNvPr id="2" name="Slide Image Placeholder 1"/>
-          <p:cNvSpPr>
-            <a:spLocks noGrp="1" noRot="1" noChangeAspect="1"/>
-          </p:cNvSpPr>
-          <p:nvPr>
-            <p:ph type="sldImg"/>
-          </p:nvPr>
-        </p:nvSpPr>
-        <p:spPr/>
-      </p:sp>
-      <p:sp>
-        <p:nvSpPr>
-          <p:cNvPr id="3" name="Notes Placeholder 2"/>
-          <p:cNvSpPr>
-            <a:spLocks noGrp="1"/>
-          </p:cNvSpPr>
-          <p:nvPr>
-            <p:ph type="body" idx="1"/>
-          </p:nvPr>
-        </p:nvSpPr>
-        <p:spPr/>
-        <p:txBody>
-          <a:bodyPr/>
-          <a:lstStyle/>
-          <a:p>
-            <a:r>
-              <a:rPr lang="en-US" dirty="0"/>
-              <a:t>Encerramento. Agradecer e abrir para perguntas. Todos os integrantes devem estar preparados para responder sobre qualquer parte do código.</a:t>
-            </a:r>
-            <a:endParaRPr lang="en-US" dirty="0"/>
-          </a:p>
-        </p:txBody>
-      </p:sp>
-      <p:sp>
-        <p:nvSpPr>
-          <p:cNvPr id="4" name="Slide Number Placeholder 3"/>
-          <p:cNvSpPr>
-            <a:spLocks noGrp="1"/>
-          </p:cNvSpPr>
-          <p:nvPr>
-            <p:ph type="sldNum" sz="quarter" idx="10"/>
-          </p:nvPr>
-        </p:nvSpPr>
-        <p:spPr/>
-        <p:txBody>
-          <a:bodyPr/>
-          <a:lstStyle/>
-          <a:p>
-            <a:fld id="{F7021451-1387-4CA6-816F-3879F97B5CBC}" type="slidenum">
-              <a:rPr lang="en-US"/>
-              <a:t>8</a:t>
             </a:fld>
             <a:endParaRPr lang="en-US"/>
           </a:p>
@@ -3082,7 +2993,7 @@
                 <a:ea typeface="Cambria" pitchFamily="34" charset="-122"/>
                 <a:cs typeface="Cambria" pitchFamily="34" charset="-120"/>
               </a:rPr>
-              <a:t>Arquitetura</a:t>
+              <a:t>Chamadas assíncronas</a:t>
             </a:r>
             <a:endParaRPr lang="en-US" sz="3800" dirty="0"/>
           </a:p>
@@ -3096,20 +3007,20 @@
         </p:nvSpPr>
         <p:spPr>
           <a:xfrm>
-            <a:off x="640080" y="1600200"/>
-            <a:ext cx="1874520" cy="1234440"/>
+            <a:off x="640080" y="1554480"/>
+            <a:ext cx="6949440" cy="4526280"/>
           </a:xfrm>
           <a:prstGeom prst="roundRect">
             <a:avLst>
-              <a:gd name="adj" fmla="val 8889"/>
+              <a:gd name="adj" fmla="val 2424"/>
             </a:avLst>
           </a:prstGeom>
           <a:solidFill>
-            <a:srgbClr val="0D1C42"/>
+            <a:srgbClr val="010736"/>
           </a:solidFill>
           <a:ln w="12700">
             <a:solidFill>
-              <a:srgbClr val="0D1C42"/>
+              <a:srgbClr val="010736"/>
             </a:solidFill>
             <a:prstDash val="solid"/>
           </a:ln>
@@ -3130,8 +3041,8 @@
         </p:nvSpPr>
         <p:spPr>
           <a:xfrm>
-            <a:off x="640080" y="1783080"/>
-            <a:ext cx="1874520" cy="411480"/>
+            <a:off x="868680" y="1783080"/>
+            <a:ext cx="6583680" cy="4069080"/>
           </a:xfrm>
           <a:prstGeom prst="rect">
             <a:avLst/>
@@ -3143,131 +3054,406 @@
           <a:bodyPr wrap="square" lIns="0" tIns="0" rIns="0" bIns="0" rtlCol="0" anchor="t"/>
           <a:lstStyle/>
           <a:p>
-            <a:pPr algn="ctr" indent="0" marL="0">
-              <a:buNone/>
-            </a:pPr>
-            <a:r>
-              <a:rPr lang="en-US" sz="2000" b="1" dirty="0">
+            <a:pPr indent="0" marL="0">
+              <a:spcAft>
+                <a:spcPts val="400"/>
+              </a:spcAft>
+              <a:buNone/>
+            </a:pPr>
+            <a:r>
+              <a:rPr lang="en-US" sz="1300" dirty="0">
                 <a:solidFill>
                   <a:srgbClr val="FCF1D0"/>
                 </a:solidFill>
-                <a:latin typeface="Calibri" pitchFamily="34" charset="0"/>
-                <a:ea typeface="Calibri" pitchFamily="34" charset="-122"/>
-                <a:cs typeface="Calibri" pitchFamily="34" charset="-120"/>
-              </a:rPr>
-              <a:t>Usuário</a:t>
-            </a:r>
-            <a:endParaRPr lang="en-US" sz="2000" dirty="0"/>
-          </a:p>
-        </p:txBody>
-      </p:sp>
-      <p:sp>
-        <p:nvSpPr>
-          <p:cNvPr id="5" name="Text 3"/>
-          <p:cNvSpPr txBox="1"/>
-          <p:nvPr/>
-        </p:nvSpPr>
-        <p:spPr>
-          <a:xfrm>
-            <a:off x="731520" y="2240280"/>
-            <a:ext cx="1691640" cy="457200"/>
-          </a:xfrm>
-          <a:prstGeom prst="rect">
-            <a:avLst/>
-          </a:prstGeom>
-          <a:noFill/>
-          <a:ln/>
-        </p:spPr>
-        <p:txBody>
-          <a:bodyPr wrap="square" lIns="0" tIns="0" rIns="0" bIns="0" rtlCol="0" anchor="t"/>
-          <a:lstStyle/>
-          <a:p>
-            <a:pPr algn="ctr" indent="0" marL="0">
+                <a:latin typeface="Courier New" pitchFamily="34" charset="0"/>
+                <a:ea typeface="Courier New" pitchFamily="34" charset="-122"/>
+                <a:cs typeface="Courier New" pitchFamily="34" charset="-120"/>
+              </a:rPr>
+              <a:t>async function request(path, params) {</a:t>
+            </a:r>
+            <a:endParaRPr lang="en-US" sz="1300" dirty="0"/>
+          </a:p>
+          <a:p>
+            <a:pPr indent="0" marL="0">
+              <a:spcAft>
+                <a:spcPts val="400"/>
+              </a:spcAft>
               <a:buNone/>
             </a:pPr>
             <a:r>
               <a:rPr lang="en-US" sz="1300" dirty="0">
                 <a:solidFill>
-                  <a:srgbClr val="C9D3F0"/>
-                </a:solidFill>
-                <a:latin typeface="Calibri" pitchFamily="34" charset="0"/>
-                <a:ea typeface="Calibri" pitchFamily="34" charset="-122"/>
-                <a:cs typeface="Calibri" pitchFamily="34" charset="-120"/>
-              </a:rPr>
-              <a:t>digita ingredientes</a:t>
+                  <a:srgbClr val="FCF1D0"/>
+                </a:solidFill>
+                <a:latin typeface="Courier New" pitchFamily="34" charset="0"/>
+                <a:ea typeface="Courier New" pitchFamily="34" charset="-122"/>
+                <a:cs typeface="Courier New" pitchFamily="34" charset="-120"/>
+              </a:rPr>
+              <a:t>  const url = new URL(CONFIG.BASE_URL + path);</a:t>
             </a:r>
             <a:endParaRPr lang="en-US" sz="1300" dirty="0"/>
           </a:p>
-        </p:txBody>
-      </p:sp>
-      <p:sp>
-        <p:nvSpPr>
-          <p:cNvPr id="6" name="Shape 4"/>
+          <a:p>
+            <a:pPr indent="0" marL="0">
+              <a:spcAft>
+                <a:spcPts val="400"/>
+              </a:spcAft>
+              <a:buNone/>
+            </a:pPr>
+            <a:r>
+              <a:rPr lang="en-US" sz="1300" dirty="0">
+                <a:solidFill>
+                  <a:srgbClr val="FCF1D0"/>
+                </a:solidFill>
+                <a:latin typeface="Courier New" pitchFamily="34" charset="0"/>
+                <a:ea typeface="Courier New" pitchFamily="34" charset="-122"/>
+                <a:cs typeface="Courier New" pitchFamily="34" charset="-120"/>
+              </a:rPr>
+              <a:t>  url.search = new URLSearchParams({ ...params, apiKey });</a:t>
+            </a:r>
+            <a:endParaRPr lang="en-US" sz="1300" dirty="0"/>
+          </a:p>
+          <a:p>
+            <a:pPr indent="0" marL="0">
+              <a:spcAft>
+                <a:spcPts val="400"/>
+              </a:spcAft>
+              <a:buNone/>
+            </a:pPr>
+            <a:r>
+              <a:rPr lang="en-US" sz="1300" dirty="0">
+                <a:solidFill>
+                  <a:srgbClr val="FCF1D0"/>
+                </a:solidFill>
+                <a:latin typeface="Courier New" pitchFamily="34" charset="0"/>
+                <a:ea typeface="Courier New" pitchFamily="34" charset="-122"/>
+                <a:cs typeface="Courier New" pitchFamily="34" charset="-120"/>
+              </a:rPr>
+              <a:t> </a:t>
+            </a:r>
+            <a:endParaRPr lang="en-US" sz="1300" dirty="0"/>
+          </a:p>
+          <a:p>
+            <a:pPr indent="0" marL="0">
+              <a:spcAft>
+                <a:spcPts val="400"/>
+              </a:spcAft>
+              <a:buNone/>
+            </a:pPr>
+            <a:r>
+              <a:rPr lang="en-US" sz="1300" dirty="0">
+                <a:solidFill>
+                  <a:srgbClr val="FCF1D0"/>
+                </a:solidFill>
+                <a:latin typeface="Courier New" pitchFamily="34" charset="0"/>
+                <a:ea typeface="Courier New" pitchFamily="34" charset="-122"/>
+                <a:cs typeface="Courier New" pitchFamily="34" charset="-120"/>
+              </a:rPr>
+              <a:t>  const controller = new AbortController();</a:t>
+            </a:r>
+            <a:endParaRPr lang="en-US" sz="1300" dirty="0"/>
+          </a:p>
+          <a:p>
+            <a:pPr indent="0" marL="0">
+              <a:spcAft>
+                <a:spcPts val="400"/>
+              </a:spcAft>
+              <a:buNone/>
+            </a:pPr>
+            <a:r>
+              <a:rPr lang="en-US" sz="1300" dirty="0">
+                <a:solidFill>
+                  <a:srgbClr val="FCF1D0"/>
+                </a:solidFill>
+                <a:latin typeface="Courier New" pitchFamily="34" charset="0"/>
+                <a:ea typeface="Courier New" pitchFamily="34" charset="-122"/>
+                <a:cs typeface="Courier New" pitchFamily="34" charset="-120"/>
+              </a:rPr>
+              <a:t>  const timer = setTimeout(() =&gt; controller.abort(), 10000);</a:t>
+            </a:r>
+            <a:endParaRPr lang="en-US" sz="1300" dirty="0"/>
+          </a:p>
+          <a:p>
+            <a:pPr indent="0" marL="0">
+              <a:spcAft>
+                <a:spcPts val="400"/>
+              </a:spcAft>
+              <a:buNone/>
+            </a:pPr>
+            <a:r>
+              <a:rPr lang="en-US" sz="1300" dirty="0">
+                <a:solidFill>
+                  <a:srgbClr val="FCF1D0"/>
+                </a:solidFill>
+                <a:latin typeface="Courier New" pitchFamily="34" charset="0"/>
+                <a:ea typeface="Courier New" pitchFamily="34" charset="-122"/>
+                <a:cs typeface="Courier New" pitchFamily="34" charset="-120"/>
+              </a:rPr>
+              <a:t> </a:t>
+            </a:r>
+            <a:endParaRPr lang="en-US" sz="1300" dirty="0"/>
+          </a:p>
+          <a:p>
+            <a:pPr indent="0" marL="0">
+              <a:spcAft>
+                <a:spcPts val="400"/>
+              </a:spcAft>
+              <a:buNone/>
+            </a:pPr>
+            <a:r>
+              <a:rPr lang="en-US" sz="1300" dirty="0">
+                <a:solidFill>
+                  <a:srgbClr val="FCF1D0"/>
+                </a:solidFill>
+                <a:latin typeface="Courier New" pitchFamily="34" charset="0"/>
+                <a:ea typeface="Courier New" pitchFamily="34" charset="-122"/>
+                <a:cs typeface="Courier New" pitchFamily="34" charset="-120"/>
+              </a:rPr>
+              <a:t>  try {</a:t>
+            </a:r>
+            <a:endParaRPr lang="en-US" sz="1300" dirty="0"/>
+          </a:p>
+          <a:p>
+            <a:pPr indent="0" marL="0">
+              <a:spcAft>
+                <a:spcPts val="400"/>
+              </a:spcAft>
+              <a:buNone/>
+            </a:pPr>
+            <a:r>
+              <a:rPr lang="en-US" sz="1300" dirty="0">
+                <a:solidFill>
+                  <a:srgbClr val="FCF1D0"/>
+                </a:solidFill>
+                <a:latin typeface="Courier New" pitchFamily="34" charset="0"/>
+                <a:ea typeface="Courier New" pitchFamily="34" charset="-122"/>
+                <a:cs typeface="Courier New" pitchFamily="34" charset="-120"/>
+              </a:rPr>
+              <a:t>    const res = await fetch(url, { signal: controller.signal });</a:t>
+            </a:r>
+            <a:endParaRPr lang="en-US" sz="1300" dirty="0"/>
+          </a:p>
+          <a:p>
+            <a:pPr indent="0" marL="0">
+              <a:spcAft>
+                <a:spcPts val="400"/>
+              </a:spcAft>
+              <a:buNone/>
+            </a:pPr>
+            <a:r>
+              <a:rPr lang="en-US" sz="1300" dirty="0">
+                <a:solidFill>
+                  <a:srgbClr val="FCF1D0"/>
+                </a:solidFill>
+                <a:latin typeface="Courier New" pitchFamily="34" charset="0"/>
+                <a:ea typeface="Courier New" pitchFamily="34" charset="-122"/>
+                <a:cs typeface="Courier New" pitchFamily="34" charset="-120"/>
+              </a:rPr>
+              <a:t>    if (!res.ok) throw new ApiError(messageFor(res.status));</a:t>
+            </a:r>
+            <a:endParaRPr lang="en-US" sz="1300" dirty="0"/>
+          </a:p>
+          <a:p>
+            <a:pPr indent="0" marL="0">
+              <a:spcAft>
+                <a:spcPts val="400"/>
+              </a:spcAft>
+              <a:buNone/>
+            </a:pPr>
+            <a:r>
+              <a:rPr lang="en-US" sz="1300" dirty="0">
+                <a:solidFill>
+                  <a:srgbClr val="FCF1D0"/>
+                </a:solidFill>
+                <a:latin typeface="Courier New" pitchFamily="34" charset="0"/>
+                <a:ea typeface="Courier New" pitchFamily="34" charset="-122"/>
+                <a:cs typeface="Courier New" pitchFamily="34" charset="-120"/>
+              </a:rPr>
+              <a:t>    return await res.json();</a:t>
+            </a:r>
+            <a:endParaRPr lang="en-US" sz="1300" dirty="0"/>
+          </a:p>
+          <a:p>
+            <a:pPr indent="0" marL="0">
+              <a:spcAft>
+                <a:spcPts val="400"/>
+              </a:spcAft>
+              <a:buNone/>
+            </a:pPr>
+            <a:r>
+              <a:rPr lang="en-US" sz="1300" dirty="0">
+                <a:solidFill>
+                  <a:srgbClr val="FCF1D0"/>
+                </a:solidFill>
+                <a:latin typeface="Courier New" pitchFamily="34" charset="0"/>
+                <a:ea typeface="Courier New" pitchFamily="34" charset="-122"/>
+                <a:cs typeface="Courier New" pitchFamily="34" charset="-120"/>
+              </a:rPr>
+              <a:t>  } catch (err) {</a:t>
+            </a:r>
+            <a:endParaRPr lang="en-US" sz="1300" dirty="0"/>
+          </a:p>
+          <a:p>
+            <a:pPr indent="0" marL="0">
+              <a:spcAft>
+                <a:spcPts val="400"/>
+              </a:spcAft>
+              <a:buNone/>
+            </a:pPr>
+            <a:r>
+              <a:rPr lang="en-US" sz="1300" dirty="0">
+                <a:solidFill>
+                  <a:srgbClr val="9DB2E8"/>
+                </a:solidFill>
+                <a:latin typeface="Courier New" pitchFamily="34" charset="0"/>
+                <a:ea typeface="Courier New" pitchFamily="34" charset="-122"/>
+                <a:cs typeface="Courier New" pitchFamily="34" charset="-120"/>
+              </a:rPr>
+              <a:t>    // traduz falhas em mensagens amigáveis</a:t>
+            </a:r>
+            <a:endParaRPr lang="en-US" sz="1300" dirty="0"/>
+          </a:p>
+          <a:p>
+            <a:pPr indent="0" marL="0">
+              <a:spcAft>
+                <a:spcPts val="400"/>
+              </a:spcAft>
+              <a:buNone/>
+            </a:pPr>
+            <a:r>
+              <a:rPr lang="en-US" sz="1300" dirty="0">
+                <a:solidFill>
+                  <a:srgbClr val="FCF1D0"/>
+                </a:solidFill>
+                <a:latin typeface="Courier New" pitchFamily="34" charset="0"/>
+                <a:ea typeface="Courier New" pitchFamily="34" charset="-122"/>
+                <a:cs typeface="Courier New" pitchFamily="34" charset="-120"/>
+              </a:rPr>
+              <a:t>  } finally {</a:t>
+            </a:r>
+            <a:endParaRPr lang="en-US" sz="1300" dirty="0"/>
+          </a:p>
+          <a:p>
+            <a:pPr indent="0" marL="0">
+              <a:spcAft>
+                <a:spcPts val="400"/>
+              </a:spcAft>
+              <a:buNone/>
+            </a:pPr>
+            <a:r>
+              <a:rPr lang="en-US" sz="1300" dirty="0">
+                <a:solidFill>
+                  <a:srgbClr val="FCF1D0"/>
+                </a:solidFill>
+                <a:latin typeface="Courier New" pitchFamily="34" charset="0"/>
+                <a:ea typeface="Courier New" pitchFamily="34" charset="-122"/>
+                <a:cs typeface="Courier New" pitchFamily="34" charset="-120"/>
+              </a:rPr>
+              <a:t>    clearTimeout(timer);</a:t>
+            </a:r>
+            <a:endParaRPr lang="en-US" sz="1300" dirty="0"/>
+          </a:p>
+          <a:p>
+            <a:pPr indent="0" marL="0">
+              <a:spcAft>
+                <a:spcPts val="400"/>
+              </a:spcAft>
+              <a:buNone/>
+            </a:pPr>
+            <a:r>
+              <a:rPr lang="en-US" sz="1300" dirty="0">
+                <a:solidFill>
+                  <a:srgbClr val="FCF1D0"/>
+                </a:solidFill>
+                <a:latin typeface="Courier New" pitchFamily="34" charset="0"/>
+                <a:ea typeface="Courier New" pitchFamily="34" charset="-122"/>
+                <a:cs typeface="Courier New" pitchFamily="34" charset="-120"/>
+              </a:rPr>
+              <a:t>  }</a:t>
+            </a:r>
+            <a:endParaRPr lang="en-US" sz="1300" dirty="0"/>
+          </a:p>
+          <a:p>
+            <a:pPr indent="0" marL="0">
+              <a:spcAft>
+                <a:spcPts val="400"/>
+              </a:spcAft>
+              <a:buNone/>
+            </a:pPr>
+            <a:r>
+              <a:rPr lang="en-US" sz="1300" dirty="0">
+                <a:solidFill>
+                  <a:srgbClr val="FCF1D0"/>
+                </a:solidFill>
+                <a:latin typeface="Courier New" pitchFamily="34" charset="0"/>
+                <a:ea typeface="Courier New" pitchFamily="34" charset="-122"/>
+                <a:cs typeface="Courier New" pitchFamily="34" charset="-120"/>
+              </a:rPr>
+              <a:t>}</a:t>
+            </a:r>
+            <a:endParaRPr lang="en-US" sz="1300" dirty="0"/>
+          </a:p>
+        </p:txBody>
+      </p:sp>
+      <p:sp>
+        <p:nvSpPr>
+          <p:cNvPr id="5" name="Shape 3"/>
           <p:cNvSpPr/>
           <p:nvPr/>
         </p:nvSpPr>
         <p:spPr>
           <a:xfrm>
-            <a:off x="2532888" y="2217420"/>
-            <a:ext cx="329184" cy="0"/>
-          </a:xfrm>
-          <a:prstGeom prst="line">
-            <a:avLst/>
-          </a:prstGeom>
-          <a:noFill/>
-          <a:ln w="25400">
+            <a:off x="7955280" y="1645920"/>
+            <a:ext cx="685800" cy="685800"/>
+          </a:xfrm>
+          <a:prstGeom prst="ellipse">
+            <a:avLst/>
+          </a:prstGeom>
+          <a:solidFill>
+            <a:srgbClr val="010736"/>
+          </a:solidFill>
+          <a:ln w="12700">
             <a:solidFill>
               <a:srgbClr val="010736"/>
             </a:solidFill>
             <a:prstDash val="solid"/>
-            <a:tailEnd type="triangle"/>
           </a:ln>
         </p:spPr>
       </p:sp>
-      <p:sp>
-        <p:nvSpPr>
-          <p:cNvPr id="7" name="Shape 5"/>
-          <p:cNvSpPr/>
-          <p:nvPr/>
-        </p:nvSpPr>
-        <p:spPr>
-          <a:xfrm>
-            <a:off x="2880360" y="1600200"/>
-            <a:ext cx="1874520" cy="1234440"/>
-          </a:xfrm>
-          <a:prstGeom prst="roundRect">
-            <a:avLst>
-              <a:gd name="adj" fmla="val 8889"/>
-            </a:avLst>
-          </a:prstGeom>
-          <a:solidFill>
-            <a:srgbClr val="0D1C42"/>
-          </a:solidFill>
-          <a:ln w="12700">
-            <a:solidFill>
-              <a:srgbClr val="0D1C42"/>
-            </a:solidFill>
-            <a:prstDash val="solid"/>
-          </a:ln>
-          <a:effectLst>
-            <a:outerShdw sx="100000" sy="100000" kx="0" ky="0" algn="bl" rotWithShape="0" blurRad="101600" dist="25400" dir="5400000">
-              <a:srgbClr val="000000">
-                <a:alpha val="15000"/>
-              </a:srgbClr>
-            </a:outerShdw>
-          </a:effectLst>
-        </p:spPr>
-      </p:sp>
-      <p:sp>
-        <p:nvSpPr>
-          <p:cNvPr id="8" name="Text 6"/>
+      <p:pic>
+        <p:nvPicPr>
+          <p:cNvPr id="6" name="Image 0" descr="preencoded.png">    </p:cNvPr>
+          <p:cNvPicPr>
+            <a:picLocks noChangeAspect="1"/>
+          </p:cNvPicPr>
+          <p:nvPr/>
+        </p:nvPicPr>
+        <p:blipFill>
+          <a:blip r:embed="rId1"/>
+          <a:stretch>
+            <a:fillRect/>
+          </a:stretch>
+        </p:blipFill>
+        <p:spPr>
+          <a:xfrm>
+            <a:off x="8126730" y="1817370"/>
+            <a:ext cx="342900" cy="342900"/>
+          </a:xfrm>
+          <a:prstGeom prst="rect">
+            <a:avLst/>
+          </a:prstGeom>
+        </p:spPr>
+      </p:pic>
+      <p:sp>
+        <p:nvSpPr>
+          <p:cNvPr id="7" name="Text 4"/>
           <p:cNvSpPr txBox="1"/>
           <p:nvPr/>
         </p:nvSpPr>
         <p:spPr>
           <a:xfrm>
-            <a:off x="2880360" y="1783080"/>
-            <a:ext cx="1874520" cy="411480"/>
+            <a:off x="8823960" y="1600200"/>
+            <a:ext cx="2743200" cy="411480"/>
           </a:xfrm>
           <a:prstGeom prst="rect">
             <a:avLst/>
@@ -3279,19 +3465,19 @@
           <a:bodyPr wrap="square" lIns="0" tIns="0" rIns="0" bIns="0" rtlCol="0" anchor="t"/>
           <a:lstStyle/>
           <a:p>
-            <a:pPr algn="ctr" indent="0" marL="0">
+            <a:pPr indent="0" marL="0">
               <a:buNone/>
             </a:pPr>
             <a:r>
               <a:rPr lang="en-US" sz="2000" b="1" dirty="0">
                 <a:solidFill>
-                  <a:srgbClr val="FCF1D0"/>
+                  <a:srgbClr val="010736"/>
                 </a:solidFill>
                 <a:latin typeface="Calibri" pitchFamily="34" charset="0"/>
                 <a:ea typeface="Calibri" pitchFamily="34" charset="-122"/>
                 <a:cs typeface="Calibri" pitchFamily="34" charset="-120"/>
               </a:rPr>
-              <a:t>Eventos</a:t>
+              <a:t>async/await</a:t>
             </a:r>
             <a:endParaRPr lang="en-US" sz="2000" dirty="0"/>
           </a:p>
@@ -3299,14 +3485,14 @@
       </p:sp>
       <p:sp>
         <p:nvSpPr>
-          <p:cNvPr id="9" name="Text 7"/>
+          <p:cNvPr id="8" name="Text 5"/>
           <p:cNvSpPr txBox="1"/>
           <p:nvPr/>
         </p:nvSpPr>
         <p:spPr>
           <a:xfrm>
-            <a:off x="2971800" y="2240280"/>
-            <a:ext cx="1691640" cy="457200"/>
+            <a:off x="8823960" y="2057400"/>
+            <a:ext cx="2743200" cy="868680"/>
           </a:xfrm>
           <a:prstGeom prst="rect">
             <a:avLst/>
@@ -3318,92 +3504,83 @@
           <a:bodyPr wrap="square" lIns="0" tIns="0" rIns="0" bIns="0" rtlCol="0" anchor="t"/>
           <a:lstStyle/>
           <a:p>
-            <a:pPr algn="ctr" indent="0" marL="0">
-              <a:buNone/>
-            </a:pPr>
-            <a:r>
-              <a:rPr lang="en-US" sz="1300" dirty="0">
-                <a:solidFill>
-                  <a:srgbClr val="C9D3F0"/>
+            <a:pPr indent="0" marL="0">
+              <a:buNone/>
+            </a:pPr>
+            <a:r>
+              <a:rPr lang="en-US" sz="1500" dirty="0">
+                <a:solidFill>
+                  <a:srgbClr val="0D1C42"/>
                 </a:solidFill>
                 <a:latin typeface="Calibri" pitchFamily="34" charset="0"/>
                 <a:ea typeface="Calibri" pitchFamily="34" charset="-122"/>
                 <a:cs typeface="Calibri" pitchFamily="34" charset="-120"/>
               </a:rPr>
-              <a:t>click, Enter, submit</a:t>
-            </a:r>
-            <a:endParaRPr lang="en-US" sz="1300" dirty="0"/>
-          </a:p>
-        </p:txBody>
-      </p:sp>
-      <p:sp>
-        <p:nvSpPr>
-          <p:cNvPr id="10" name="Shape 8"/>
+              <a:t>O código espera a resposta sem travar a página.</a:t>
+            </a:r>
+            <a:endParaRPr lang="en-US" sz="1500" dirty="0"/>
+          </a:p>
+        </p:txBody>
+      </p:sp>
+      <p:sp>
+        <p:nvSpPr>
+          <p:cNvPr id="9" name="Shape 6"/>
           <p:cNvSpPr/>
           <p:nvPr/>
         </p:nvSpPr>
         <p:spPr>
           <a:xfrm>
-            <a:off x="4773168" y="2217420"/>
-            <a:ext cx="329184" cy="0"/>
-          </a:xfrm>
-          <a:prstGeom prst="line">
-            <a:avLst/>
-          </a:prstGeom>
-          <a:noFill/>
-          <a:ln w="25400">
+            <a:off x="7955280" y="3200400"/>
+            <a:ext cx="685800" cy="685800"/>
+          </a:xfrm>
+          <a:prstGeom prst="ellipse">
+            <a:avLst/>
+          </a:prstGeom>
+          <a:solidFill>
+            <a:srgbClr val="010736"/>
+          </a:solidFill>
+          <a:ln w="12700">
             <a:solidFill>
               <a:srgbClr val="010736"/>
             </a:solidFill>
             <a:prstDash val="solid"/>
-            <a:tailEnd type="triangle"/>
           </a:ln>
         </p:spPr>
       </p:sp>
-      <p:sp>
-        <p:nvSpPr>
-          <p:cNvPr id="11" name="Shape 9"/>
-          <p:cNvSpPr/>
-          <p:nvPr/>
-        </p:nvSpPr>
-        <p:spPr>
-          <a:xfrm>
-            <a:off x="5120640" y="1600200"/>
-            <a:ext cx="1874520" cy="1234440"/>
-          </a:xfrm>
-          <a:prstGeom prst="roundRect">
-            <a:avLst>
-              <a:gd name="adj" fmla="val 8889"/>
-            </a:avLst>
-          </a:prstGeom>
-          <a:solidFill>
-            <a:srgbClr val="0D1C42"/>
-          </a:solidFill>
-          <a:ln w="12700">
-            <a:solidFill>
-              <a:srgbClr val="0D1C42"/>
-            </a:solidFill>
-            <a:prstDash val="solid"/>
-          </a:ln>
-          <a:effectLst>
-            <a:outerShdw sx="100000" sy="100000" kx="0" ky="0" algn="bl" rotWithShape="0" blurRad="101600" dist="25400" dir="5400000">
-              <a:srgbClr val="000000">
-                <a:alpha val="15000"/>
-              </a:srgbClr>
-            </a:outerShdw>
-          </a:effectLst>
-        </p:spPr>
-      </p:sp>
-      <p:sp>
-        <p:nvSpPr>
-          <p:cNvPr id="12" name="Text 10"/>
+      <p:pic>
+        <p:nvPicPr>
+          <p:cNvPr id="10" name="Image 1" descr="preencoded.png">    </p:cNvPr>
+          <p:cNvPicPr>
+            <a:picLocks noChangeAspect="1"/>
+          </p:cNvPicPr>
+          <p:nvPr/>
+        </p:nvPicPr>
+        <p:blipFill>
+          <a:blip r:embed="rId2"/>
+          <a:stretch>
+            <a:fillRect/>
+          </a:stretch>
+        </p:blipFill>
+        <p:spPr>
+          <a:xfrm>
+            <a:off x="8126730" y="3371850"/>
+            <a:ext cx="342900" cy="342900"/>
+          </a:xfrm>
+          <a:prstGeom prst="rect">
+            <a:avLst/>
+          </a:prstGeom>
+        </p:spPr>
+      </p:pic>
+      <p:sp>
+        <p:nvSpPr>
+          <p:cNvPr id="11" name="Text 7"/>
           <p:cNvSpPr txBox="1"/>
           <p:nvPr/>
         </p:nvSpPr>
         <p:spPr>
           <a:xfrm>
-            <a:off x="5120640" y="1783080"/>
-            <a:ext cx="1874520" cy="411480"/>
+            <a:off x="8823960" y="3154680"/>
+            <a:ext cx="2743200" cy="411480"/>
           </a:xfrm>
           <a:prstGeom prst="rect">
             <a:avLst/>
@@ -3415,19 +3592,19 @@
           <a:bodyPr wrap="square" lIns="0" tIns="0" rIns="0" bIns="0" rtlCol="0" anchor="t"/>
           <a:lstStyle/>
           <a:p>
-            <a:pPr algn="ctr" indent="0" marL="0">
+            <a:pPr indent="0" marL="0">
               <a:buNone/>
             </a:pPr>
             <a:r>
               <a:rPr lang="en-US" sz="2000" b="1" dirty="0">
                 <a:solidFill>
-                  <a:srgbClr val="FCF1D0"/>
+                  <a:srgbClr val="010736"/>
                 </a:solidFill>
                 <a:latin typeface="Calibri" pitchFamily="34" charset="0"/>
                 <a:ea typeface="Calibri" pitchFamily="34" charset="-122"/>
                 <a:cs typeface="Calibri" pitchFamily="34" charset="-120"/>
               </a:rPr>
-              <a:t>request()</a:t>
+              <a:t>AbortController</a:t>
             </a:r>
             <a:endParaRPr lang="en-US" sz="2000" dirty="0"/>
           </a:p>
@@ -3435,14 +3612,14 @@
       </p:sp>
       <p:sp>
         <p:nvSpPr>
-          <p:cNvPr id="13" name="Text 11"/>
+          <p:cNvPr id="12" name="Text 8"/>
           <p:cNvSpPr txBox="1"/>
           <p:nvPr/>
         </p:nvSpPr>
         <p:spPr>
           <a:xfrm>
-            <a:off x="5212080" y="2240280"/>
-            <a:ext cx="1691640" cy="457200"/>
+            <a:off x="8823960" y="3611880"/>
+            <a:ext cx="2743200" cy="868680"/>
           </a:xfrm>
           <a:prstGeom prst="rect">
             <a:avLst/>
@@ -3454,92 +3631,83 @@
           <a:bodyPr wrap="square" lIns="0" tIns="0" rIns="0" bIns="0" rtlCol="0" anchor="t"/>
           <a:lstStyle/>
           <a:p>
-            <a:pPr algn="ctr" indent="0" marL="0">
-              <a:buNone/>
-            </a:pPr>
-            <a:r>
-              <a:rPr lang="en-US" sz="1300" dirty="0">
-                <a:solidFill>
-                  <a:srgbClr val="C9D3F0"/>
+            <a:pPr indent="0" marL="0">
+              <a:buNone/>
+            </a:pPr>
+            <a:r>
+              <a:rPr lang="en-US" sz="1500" dirty="0">
+                <a:solidFill>
+                  <a:srgbClr val="0D1C42"/>
                 </a:solidFill>
                 <a:latin typeface="Calibri" pitchFamily="34" charset="0"/>
                 <a:ea typeface="Calibri" pitchFamily="34" charset="-122"/>
                 <a:cs typeface="Calibri" pitchFamily="34" charset="-120"/>
               </a:rPr>
-              <a:t>fetch com async/await</a:t>
-            </a:r>
-            <a:endParaRPr lang="en-US" sz="1300" dirty="0"/>
-          </a:p>
-        </p:txBody>
-      </p:sp>
-      <p:sp>
-        <p:nvSpPr>
-          <p:cNvPr id="14" name="Shape 12"/>
+              <a:t>Cancela a busca se a API passar de 10 segundos.</a:t>
+            </a:r>
+            <a:endParaRPr lang="en-US" sz="1500" dirty="0"/>
+          </a:p>
+        </p:txBody>
+      </p:sp>
+      <p:sp>
+        <p:nvSpPr>
+          <p:cNvPr id="13" name="Shape 9"/>
           <p:cNvSpPr/>
           <p:nvPr/>
         </p:nvSpPr>
         <p:spPr>
           <a:xfrm>
-            <a:off x="7013448" y="2217420"/>
-            <a:ext cx="329184" cy="0"/>
-          </a:xfrm>
-          <a:prstGeom prst="line">
-            <a:avLst/>
-          </a:prstGeom>
-          <a:noFill/>
-          <a:ln w="25400">
+            <a:off x="7955280" y="4754880"/>
+            <a:ext cx="685800" cy="685800"/>
+          </a:xfrm>
+          <a:prstGeom prst="ellipse">
+            <a:avLst/>
+          </a:prstGeom>
+          <a:solidFill>
+            <a:srgbClr val="010736"/>
+          </a:solidFill>
+          <a:ln w="12700">
             <a:solidFill>
               <a:srgbClr val="010736"/>
             </a:solidFill>
             <a:prstDash val="solid"/>
-            <a:tailEnd type="triangle"/>
           </a:ln>
         </p:spPr>
       </p:sp>
-      <p:sp>
-        <p:nvSpPr>
-          <p:cNvPr id="15" name="Shape 13"/>
-          <p:cNvSpPr/>
-          <p:nvPr/>
-        </p:nvSpPr>
-        <p:spPr>
-          <a:xfrm>
-            <a:off x="7360920" y="1600200"/>
-            <a:ext cx="1874520" cy="1234440"/>
-          </a:xfrm>
-          <a:prstGeom prst="roundRect">
-            <a:avLst>
-              <a:gd name="adj" fmla="val 8889"/>
-            </a:avLst>
-          </a:prstGeom>
-          <a:solidFill>
-            <a:srgbClr val="22396F"/>
-          </a:solidFill>
-          <a:ln w="12700">
-            <a:solidFill>
-              <a:srgbClr val="22396F"/>
-            </a:solidFill>
-            <a:prstDash val="solid"/>
-          </a:ln>
-          <a:effectLst>
-            <a:outerShdw sx="100000" sy="100000" kx="0" ky="0" algn="bl" rotWithShape="0" blurRad="101600" dist="25400" dir="5400000">
-              <a:srgbClr val="000000">
-                <a:alpha val="15000"/>
-              </a:srgbClr>
-            </a:outerShdw>
-          </a:effectLst>
-        </p:spPr>
-      </p:sp>
-      <p:sp>
-        <p:nvSpPr>
-          <p:cNvPr id="16" name="Text 14"/>
+      <p:pic>
+        <p:nvPicPr>
+          <p:cNvPr id="14" name="Image 2" descr="preencoded.png">    </p:cNvPr>
+          <p:cNvPicPr>
+            <a:picLocks noChangeAspect="1"/>
+          </p:cNvPicPr>
+          <p:nvPr/>
+        </p:nvPicPr>
+        <p:blipFill>
+          <a:blip r:embed="rId3"/>
+          <a:stretch>
+            <a:fillRect/>
+          </a:stretch>
+        </p:blipFill>
+        <p:spPr>
+          <a:xfrm>
+            <a:off x="8126730" y="4926330"/>
+            <a:ext cx="342900" cy="342900"/>
+          </a:xfrm>
+          <a:prstGeom prst="rect">
+            <a:avLst/>
+          </a:prstGeom>
+        </p:spPr>
+      </p:pic>
+      <p:sp>
+        <p:nvSpPr>
+          <p:cNvPr id="15" name="Text 10"/>
           <p:cNvSpPr txBox="1"/>
           <p:nvPr/>
         </p:nvSpPr>
         <p:spPr>
           <a:xfrm>
-            <a:off x="7360920" y="1783080"/>
-            <a:ext cx="1874520" cy="411480"/>
+            <a:off x="8823960" y="4709160"/>
+            <a:ext cx="2743200" cy="411480"/>
           </a:xfrm>
           <a:prstGeom prst="rect">
             <a:avLst/>
@@ -3551,19 +3719,19 @@
           <a:bodyPr wrap="square" lIns="0" tIns="0" rIns="0" bIns="0" rtlCol="0" anchor="t"/>
           <a:lstStyle/>
           <a:p>
-            <a:pPr algn="ctr" indent="0" marL="0">
+            <a:pPr indent="0" marL="0">
               <a:buNone/>
             </a:pPr>
             <a:r>
               <a:rPr lang="en-US" sz="2000" b="1" dirty="0">
                 <a:solidFill>
-                  <a:srgbClr val="FCF1D0"/>
+                  <a:srgbClr val="010736"/>
                 </a:solidFill>
                 <a:latin typeface="Calibri" pitchFamily="34" charset="0"/>
                 <a:ea typeface="Calibri" pitchFamily="34" charset="-122"/>
                 <a:cs typeface="Calibri" pitchFamily="34" charset="-120"/>
               </a:rPr>
-              <a:t>Spoonacular</a:t>
+              <a:t>try/catch/finally</a:t>
             </a:r>
             <a:endParaRPr lang="en-US" sz="2000" dirty="0"/>
           </a:p>
@@ -3571,14 +3739,14 @@
       </p:sp>
       <p:sp>
         <p:nvSpPr>
-          <p:cNvPr id="17" name="Text 15"/>
+          <p:cNvPr id="16" name="Text 11"/>
           <p:cNvSpPr txBox="1"/>
           <p:nvPr/>
         </p:nvSpPr>
         <p:spPr>
           <a:xfrm>
-            <a:off x="7452360" y="2240280"/>
-            <a:ext cx="1691640" cy="457200"/>
+            <a:off x="8823960" y="5166360"/>
+            <a:ext cx="2743200" cy="868680"/>
           </a:xfrm>
           <a:prstGeom prst="rect">
             <a:avLst/>
@@ -3590,642 +3758,19 @@
           <a:bodyPr wrap="square" lIns="0" tIns="0" rIns="0" bIns="0" rtlCol="0" anchor="t"/>
           <a:lstStyle/>
           <a:p>
-            <a:pPr algn="ctr" indent="0" marL="0">
-              <a:buNone/>
-            </a:pPr>
-            <a:r>
-              <a:rPr lang="en-US" sz="1300" dirty="0">
-                <a:solidFill>
-                  <a:srgbClr val="C9D3F0"/>
+            <a:pPr indent="0" marL="0">
+              <a:buNone/>
+            </a:pPr>
+            <a:r>
+              <a:rPr lang="en-US" sz="1500" dirty="0">
+                <a:solidFill>
+                  <a:srgbClr val="0D1C42"/>
                 </a:solidFill>
                 <a:latin typeface="Calibri" pitchFamily="34" charset="0"/>
                 <a:ea typeface="Calibri" pitchFamily="34" charset="-122"/>
                 <a:cs typeface="Calibri" pitchFamily="34" charset="-120"/>
               </a:rPr>
-              <a:t>responde em JSON</a:t>
-            </a:r>
-            <a:endParaRPr lang="en-US" sz="1300" dirty="0"/>
-          </a:p>
-        </p:txBody>
-      </p:sp>
-      <p:sp>
-        <p:nvSpPr>
-          <p:cNvPr id="18" name="Shape 16"/>
-          <p:cNvSpPr/>
-          <p:nvPr/>
-        </p:nvSpPr>
-        <p:spPr>
-          <a:xfrm>
-            <a:off x="9253728" y="2217420"/>
-            <a:ext cx="329184" cy="0"/>
-          </a:xfrm>
-          <a:prstGeom prst="line">
-            <a:avLst/>
-          </a:prstGeom>
-          <a:noFill/>
-          <a:ln w="25400">
-            <a:solidFill>
-              <a:srgbClr val="010736"/>
-            </a:solidFill>
-            <a:prstDash val="solid"/>
-            <a:tailEnd type="triangle"/>
-          </a:ln>
-        </p:spPr>
-      </p:sp>
-      <p:sp>
-        <p:nvSpPr>
-          <p:cNvPr id="19" name="Shape 17"/>
-          <p:cNvSpPr/>
-          <p:nvPr/>
-        </p:nvSpPr>
-        <p:spPr>
-          <a:xfrm>
-            <a:off x="9601200" y="1600200"/>
-            <a:ext cx="1874520" cy="1234440"/>
-          </a:xfrm>
-          <a:prstGeom prst="roundRect">
-            <a:avLst>
-              <a:gd name="adj" fmla="val 8889"/>
-            </a:avLst>
-          </a:prstGeom>
-          <a:solidFill>
-            <a:srgbClr val="0D1C42"/>
-          </a:solidFill>
-          <a:ln w="12700">
-            <a:solidFill>
-              <a:srgbClr val="0D1C42"/>
-            </a:solidFill>
-            <a:prstDash val="solid"/>
-          </a:ln>
-          <a:effectLst>
-            <a:outerShdw sx="100000" sy="100000" kx="0" ky="0" algn="bl" rotWithShape="0" blurRad="101600" dist="25400" dir="5400000">
-              <a:srgbClr val="000000">
-                <a:alpha val="15000"/>
-              </a:srgbClr>
-            </a:outerShdw>
-          </a:effectLst>
-        </p:spPr>
-      </p:sp>
-      <p:sp>
-        <p:nvSpPr>
-          <p:cNvPr id="20" name="Text 18"/>
-          <p:cNvSpPr txBox="1"/>
-          <p:nvPr/>
-        </p:nvSpPr>
-        <p:spPr>
-          <a:xfrm>
-            <a:off x="9601200" y="1783080"/>
-            <a:ext cx="1874520" cy="411480"/>
-          </a:xfrm>
-          <a:prstGeom prst="rect">
-            <a:avLst/>
-          </a:prstGeom>
-          <a:noFill/>
-          <a:ln/>
-        </p:spPr>
-        <p:txBody>
-          <a:bodyPr wrap="square" lIns="0" tIns="0" rIns="0" bIns="0" rtlCol="0" anchor="t"/>
-          <a:lstStyle/>
-          <a:p>
-            <a:pPr algn="ctr" indent="0" marL="0">
-              <a:buNone/>
-            </a:pPr>
-            <a:r>
-              <a:rPr lang="en-US" sz="2000" b="1" dirty="0">
-                <a:solidFill>
-                  <a:srgbClr val="FCF1D0"/>
-                </a:solidFill>
-                <a:latin typeface="Calibri" pitchFamily="34" charset="0"/>
-                <a:ea typeface="Calibri" pitchFamily="34" charset="-122"/>
-                <a:cs typeface="Calibri" pitchFamily="34" charset="-120"/>
-              </a:rPr>
-              <a:t>Render</a:t>
-            </a:r>
-            <a:endParaRPr lang="en-US" sz="2000" dirty="0"/>
-          </a:p>
-        </p:txBody>
-      </p:sp>
-      <p:sp>
-        <p:nvSpPr>
-          <p:cNvPr id="21" name="Text 19"/>
-          <p:cNvSpPr txBox="1"/>
-          <p:nvPr/>
-        </p:nvSpPr>
-        <p:spPr>
-          <a:xfrm>
-            <a:off x="9692640" y="2240280"/>
-            <a:ext cx="1691640" cy="457200"/>
-          </a:xfrm>
-          <a:prstGeom prst="rect">
-            <a:avLst/>
-          </a:prstGeom>
-          <a:noFill/>
-          <a:ln/>
-        </p:spPr>
-        <p:txBody>
-          <a:bodyPr wrap="square" lIns="0" tIns="0" rIns="0" bIns="0" rtlCol="0" anchor="t"/>
-          <a:lstStyle/>
-          <a:p>
-            <a:pPr algn="ctr" indent="0" marL="0">
-              <a:buNone/>
-            </a:pPr>
-            <a:r>
-              <a:rPr lang="en-US" sz="1300" dirty="0">
-                <a:solidFill>
-                  <a:srgbClr val="C9D3F0"/>
-                </a:solidFill>
-                <a:latin typeface="Calibri" pitchFamily="34" charset="0"/>
-                <a:ea typeface="Calibri" pitchFamily="34" charset="-122"/>
-                <a:cs typeface="Calibri" pitchFamily="34" charset="-120"/>
-              </a:rPr>
-              <a:t>cards no DOM</a:t>
-            </a:r>
-            <a:endParaRPr lang="en-US" sz="1300" dirty="0"/>
-          </a:p>
-        </p:txBody>
-      </p:sp>
-      <p:sp>
-        <p:nvSpPr>
-          <p:cNvPr id="22" name="Text 20"/>
-          <p:cNvSpPr txBox="1"/>
-          <p:nvPr/>
-        </p:nvSpPr>
-        <p:spPr>
-          <a:xfrm>
-            <a:off x="640080" y="3337560"/>
-            <a:ext cx="5486400" cy="457200"/>
-          </a:xfrm>
-          <a:prstGeom prst="rect">
-            <a:avLst/>
-          </a:prstGeom>
-          <a:noFill/>
-          <a:ln/>
-        </p:spPr>
-        <p:txBody>
-          <a:bodyPr wrap="square" lIns="0" tIns="0" rIns="0" bIns="0" rtlCol="0" anchor="t"/>
-          <a:lstStyle/>
-          <a:p>
-            <a:pPr indent="0" marL="0">
-              <a:buNone/>
-            </a:pPr>
-            <a:r>
-              <a:rPr lang="en-US" sz="2400" b="1" dirty="0">
-                <a:solidFill>
-                  <a:srgbClr val="010736"/>
-                </a:solidFill>
-                <a:latin typeface="Cambria" pitchFamily="34" charset="0"/>
-                <a:ea typeface="Cambria" pitchFamily="34" charset="-122"/>
-                <a:cs typeface="Cambria" pitchFamily="34" charset="-120"/>
-              </a:rPr>
-              <a:t>Arquivos do projeto</a:t>
-            </a:r>
-            <a:endParaRPr lang="en-US" sz="2400" dirty="0"/>
-          </a:p>
-        </p:txBody>
-      </p:sp>
-      <p:sp>
-        <p:nvSpPr>
-          <p:cNvPr id="23" name="Shape 21"/>
-          <p:cNvSpPr/>
-          <p:nvPr/>
-        </p:nvSpPr>
-        <p:spPr>
-          <a:xfrm>
-            <a:off x="640080" y="3931920"/>
-            <a:ext cx="2587752" cy="1737360"/>
-          </a:xfrm>
-          <a:prstGeom prst="roundRect">
-            <a:avLst>
-              <a:gd name="adj" fmla="val 6316"/>
-            </a:avLst>
-          </a:prstGeom>
-          <a:solidFill>
-            <a:srgbClr val="FFFAEA"/>
-          </a:solidFill>
-          <a:ln w="12700">
-            <a:solidFill>
-              <a:srgbClr val="FFFAEA"/>
-            </a:solidFill>
-            <a:prstDash val="solid"/>
-          </a:ln>
-          <a:effectLst>
-            <a:outerShdw sx="100000" sy="100000" kx="0" ky="0" algn="bl" rotWithShape="0" blurRad="101600" dist="25400" dir="5400000">
-              <a:srgbClr val="000000">
-                <a:alpha val="15000"/>
-              </a:srgbClr>
-            </a:outerShdw>
-          </a:effectLst>
-        </p:spPr>
-      </p:sp>
-      <p:sp>
-        <p:nvSpPr>
-          <p:cNvPr id="24" name="Text 22"/>
-          <p:cNvSpPr txBox="1"/>
-          <p:nvPr/>
-        </p:nvSpPr>
-        <p:spPr>
-          <a:xfrm>
-            <a:off x="868680" y="4160520"/>
-            <a:ext cx="2194560" cy="365760"/>
-          </a:xfrm>
-          <a:prstGeom prst="rect">
-            <a:avLst/>
-          </a:prstGeom>
-          <a:noFill/>
-          <a:ln/>
-        </p:spPr>
-        <p:txBody>
-          <a:bodyPr wrap="square" lIns="0" tIns="0" rIns="0" bIns="0" rtlCol="0" anchor="t"/>
-          <a:lstStyle/>
-          <a:p>
-            <a:pPr indent="0" marL="0">
-              <a:buNone/>
-            </a:pPr>
-            <a:r>
-              <a:rPr lang="en-US" sz="1700" b="1" dirty="0">
-                <a:solidFill>
-                  <a:srgbClr val="22396F"/>
-                </a:solidFill>
-                <a:latin typeface="Courier New" pitchFamily="34" charset="0"/>
-                <a:ea typeface="Courier New" pitchFamily="34" charset="-122"/>
-                <a:cs typeface="Courier New" pitchFamily="34" charset="-120"/>
-              </a:rPr>
-              <a:t>index.html</a:t>
-            </a:r>
-            <a:endParaRPr lang="en-US" sz="1700" dirty="0"/>
-          </a:p>
-        </p:txBody>
-      </p:sp>
-      <p:sp>
-        <p:nvSpPr>
-          <p:cNvPr id="25" name="Text 23"/>
-          <p:cNvSpPr txBox="1"/>
-          <p:nvPr/>
-        </p:nvSpPr>
-        <p:spPr>
-          <a:xfrm>
-            <a:off x="868680" y="4617720"/>
-            <a:ext cx="2194560" cy="822960"/>
-          </a:xfrm>
-          <a:prstGeom prst="rect">
-            <a:avLst/>
-          </a:prstGeom>
-          <a:noFill/>
-          <a:ln/>
-        </p:spPr>
-        <p:txBody>
-          <a:bodyPr wrap="square" lIns="0" tIns="0" rIns="0" bIns="0" rtlCol="0" anchor="t"/>
-          <a:lstStyle/>
-          <a:p>
-            <a:pPr indent="0" marL="0">
-              <a:buNone/>
-            </a:pPr>
-            <a:r>
-              <a:rPr lang="en-US" sz="1500" dirty="0">
-                <a:solidFill>
-                  <a:srgbClr val="0D1C42"/>
-                </a:solidFill>
-                <a:latin typeface="Calibri" pitchFamily="34" charset="0"/>
-                <a:ea typeface="Calibri" pitchFamily="34" charset="-122"/>
-                <a:cs typeface="Calibri" pitchFamily="34" charset="-120"/>
-              </a:rPr>
-              <a:t>Estrutura da página, formulário e modal</a:t>
-            </a:r>
-            <a:endParaRPr lang="en-US" sz="1500" dirty="0"/>
-          </a:p>
-        </p:txBody>
-      </p:sp>
-      <p:sp>
-        <p:nvSpPr>
-          <p:cNvPr id="26" name="Shape 24"/>
-          <p:cNvSpPr/>
-          <p:nvPr/>
-        </p:nvSpPr>
-        <p:spPr>
-          <a:xfrm>
-            <a:off x="3410712" y="3931920"/>
-            <a:ext cx="2587752" cy="1737360"/>
-          </a:xfrm>
-          <a:prstGeom prst="roundRect">
-            <a:avLst>
-              <a:gd name="adj" fmla="val 6316"/>
-            </a:avLst>
-          </a:prstGeom>
-          <a:solidFill>
-            <a:srgbClr val="FFFAEA"/>
-          </a:solidFill>
-          <a:ln w="12700">
-            <a:solidFill>
-              <a:srgbClr val="FFFAEA"/>
-            </a:solidFill>
-            <a:prstDash val="solid"/>
-          </a:ln>
-          <a:effectLst>
-            <a:outerShdw sx="100000" sy="100000" kx="0" ky="0" algn="bl" rotWithShape="0" blurRad="101600" dist="25400" dir="5400000">
-              <a:srgbClr val="000000">
-                <a:alpha val="15000"/>
-              </a:srgbClr>
-            </a:outerShdw>
-          </a:effectLst>
-        </p:spPr>
-      </p:sp>
-      <p:sp>
-        <p:nvSpPr>
-          <p:cNvPr id="27" name="Text 25"/>
-          <p:cNvSpPr txBox="1"/>
-          <p:nvPr/>
-        </p:nvSpPr>
-        <p:spPr>
-          <a:xfrm>
-            <a:off x="3639312" y="4160520"/>
-            <a:ext cx="2194560" cy="365760"/>
-          </a:xfrm>
-          <a:prstGeom prst="rect">
-            <a:avLst/>
-          </a:prstGeom>
-          <a:noFill/>
-          <a:ln/>
-        </p:spPr>
-        <p:txBody>
-          <a:bodyPr wrap="square" lIns="0" tIns="0" rIns="0" bIns="0" rtlCol="0" anchor="t"/>
-          <a:lstStyle/>
-          <a:p>
-            <a:pPr indent="0" marL="0">
-              <a:buNone/>
-            </a:pPr>
-            <a:r>
-              <a:rPr lang="en-US" sz="1700" b="1" dirty="0">
-                <a:solidFill>
-                  <a:srgbClr val="22396F"/>
-                </a:solidFill>
-                <a:latin typeface="Courier New" pitchFamily="34" charset="0"/>
-                <a:ea typeface="Courier New" pitchFamily="34" charset="-122"/>
-                <a:cs typeface="Courier New" pitchFamily="34" charset="-120"/>
-              </a:rPr>
-              <a:t>style.css</a:t>
-            </a:r>
-            <a:endParaRPr lang="en-US" sz="1700" dirty="0"/>
-          </a:p>
-        </p:txBody>
-      </p:sp>
-      <p:sp>
-        <p:nvSpPr>
-          <p:cNvPr id="28" name="Text 26"/>
-          <p:cNvSpPr txBox="1"/>
-          <p:nvPr/>
-        </p:nvSpPr>
-        <p:spPr>
-          <a:xfrm>
-            <a:off x="3639312" y="4617720"/>
-            <a:ext cx="2194560" cy="822960"/>
-          </a:xfrm>
-          <a:prstGeom prst="rect">
-            <a:avLst/>
-          </a:prstGeom>
-          <a:noFill/>
-          <a:ln/>
-        </p:spPr>
-        <p:txBody>
-          <a:bodyPr wrap="square" lIns="0" tIns="0" rIns="0" bIns="0" rtlCol="0" anchor="t"/>
-          <a:lstStyle/>
-          <a:p>
-            <a:pPr indent="0" marL="0">
-              <a:buNone/>
-            </a:pPr>
-            <a:r>
-              <a:rPr lang="en-US" sz="1500" dirty="0">
-                <a:solidFill>
-                  <a:srgbClr val="0D1C42"/>
-                </a:solidFill>
-                <a:latin typeface="Calibri" pitchFamily="34" charset="0"/>
-                <a:ea typeface="Calibri" pitchFamily="34" charset="-122"/>
-                <a:cs typeface="Calibri" pitchFamily="34" charset="-120"/>
-              </a:rPr>
-              <a:t>Visual com a paleta Color Hunt</a:t>
-            </a:r>
-            <a:endParaRPr lang="en-US" sz="1500" dirty="0"/>
-          </a:p>
-        </p:txBody>
-      </p:sp>
-      <p:sp>
-        <p:nvSpPr>
-          <p:cNvPr id="29" name="Shape 27"/>
-          <p:cNvSpPr/>
-          <p:nvPr/>
-        </p:nvSpPr>
-        <p:spPr>
-          <a:xfrm>
-            <a:off x="6181344" y="3931920"/>
-            <a:ext cx="2587752" cy="1737360"/>
-          </a:xfrm>
-          <a:prstGeom prst="roundRect">
-            <a:avLst>
-              <a:gd name="adj" fmla="val 6316"/>
-            </a:avLst>
-          </a:prstGeom>
-          <a:solidFill>
-            <a:srgbClr val="FFFAEA"/>
-          </a:solidFill>
-          <a:ln w="12700">
-            <a:solidFill>
-              <a:srgbClr val="FFFAEA"/>
-            </a:solidFill>
-            <a:prstDash val="solid"/>
-          </a:ln>
-          <a:effectLst>
-            <a:outerShdw sx="100000" sy="100000" kx="0" ky="0" algn="bl" rotWithShape="0" blurRad="101600" dist="25400" dir="5400000">
-              <a:srgbClr val="000000">
-                <a:alpha val="15000"/>
-              </a:srgbClr>
-            </a:outerShdw>
-          </a:effectLst>
-        </p:spPr>
-      </p:sp>
-      <p:sp>
-        <p:nvSpPr>
-          <p:cNvPr id="30" name="Text 28"/>
-          <p:cNvSpPr txBox="1"/>
-          <p:nvPr/>
-        </p:nvSpPr>
-        <p:spPr>
-          <a:xfrm>
-            <a:off x="6409944" y="4160520"/>
-            <a:ext cx="2194560" cy="365760"/>
-          </a:xfrm>
-          <a:prstGeom prst="rect">
-            <a:avLst/>
-          </a:prstGeom>
-          <a:noFill/>
-          <a:ln/>
-        </p:spPr>
-        <p:txBody>
-          <a:bodyPr wrap="square" lIns="0" tIns="0" rIns="0" bIns="0" rtlCol="0" anchor="t"/>
-          <a:lstStyle/>
-          <a:p>
-            <a:pPr indent="0" marL="0">
-              <a:buNone/>
-            </a:pPr>
-            <a:r>
-              <a:rPr lang="en-US" sz="1700" b="1" dirty="0">
-                <a:solidFill>
-                  <a:srgbClr val="22396F"/>
-                </a:solidFill>
-                <a:latin typeface="Courier New" pitchFamily="34" charset="0"/>
-                <a:ea typeface="Courier New" pitchFamily="34" charset="-122"/>
-                <a:cs typeface="Courier New" pitchFamily="34" charset="-120"/>
-              </a:rPr>
-              <a:t>config.js</a:t>
-            </a:r>
-            <a:endParaRPr lang="en-US" sz="1700" dirty="0"/>
-          </a:p>
-        </p:txBody>
-      </p:sp>
-      <p:sp>
-        <p:nvSpPr>
-          <p:cNvPr id="31" name="Text 29"/>
-          <p:cNvSpPr txBox="1"/>
-          <p:nvPr/>
-        </p:nvSpPr>
-        <p:spPr>
-          <a:xfrm>
-            <a:off x="6409944" y="4617720"/>
-            <a:ext cx="2194560" cy="822960"/>
-          </a:xfrm>
-          <a:prstGeom prst="rect">
-            <a:avLst/>
-          </a:prstGeom>
-          <a:noFill/>
-          <a:ln/>
-        </p:spPr>
-        <p:txBody>
-          <a:bodyPr wrap="square" lIns="0" tIns="0" rIns="0" bIns="0" rtlCol="0" anchor="t"/>
-          <a:lstStyle/>
-          <a:p>
-            <a:pPr indent="0" marL="0">
-              <a:buNone/>
-            </a:pPr>
-            <a:r>
-              <a:rPr lang="en-US" sz="1500" dirty="0">
-                <a:solidFill>
-                  <a:srgbClr val="0D1C42"/>
-                </a:solidFill>
-                <a:latin typeface="Calibri" pitchFamily="34" charset="0"/>
-                <a:ea typeface="Calibri" pitchFamily="34" charset="-122"/>
-                <a:cs typeface="Calibri" pitchFamily="34" charset="-120"/>
-              </a:rPr>
-              <a:t>Configuração com a chave da API</a:t>
-            </a:r>
-            <a:endParaRPr lang="en-US" sz="1500" dirty="0"/>
-          </a:p>
-        </p:txBody>
-      </p:sp>
-      <p:sp>
-        <p:nvSpPr>
-          <p:cNvPr id="32" name="Shape 30"/>
-          <p:cNvSpPr/>
-          <p:nvPr/>
-        </p:nvSpPr>
-        <p:spPr>
-          <a:xfrm>
-            <a:off x="8951976" y="3931920"/>
-            <a:ext cx="2587752" cy="1737360"/>
-          </a:xfrm>
-          <a:prstGeom prst="roundRect">
-            <a:avLst>
-              <a:gd name="adj" fmla="val 6316"/>
-            </a:avLst>
-          </a:prstGeom>
-          <a:solidFill>
-            <a:srgbClr val="FFFAEA"/>
-          </a:solidFill>
-          <a:ln w="12700">
-            <a:solidFill>
-              <a:srgbClr val="FFFAEA"/>
-            </a:solidFill>
-            <a:prstDash val="solid"/>
-          </a:ln>
-          <a:effectLst>
-            <a:outerShdw sx="100000" sy="100000" kx="0" ky="0" algn="bl" rotWithShape="0" blurRad="101600" dist="25400" dir="5400000">
-              <a:srgbClr val="000000">
-                <a:alpha val="15000"/>
-              </a:srgbClr>
-            </a:outerShdw>
-          </a:effectLst>
-        </p:spPr>
-      </p:sp>
-      <p:sp>
-        <p:nvSpPr>
-          <p:cNvPr id="33" name="Text 31"/>
-          <p:cNvSpPr txBox="1"/>
-          <p:nvPr/>
-        </p:nvSpPr>
-        <p:spPr>
-          <a:xfrm>
-            <a:off x="9180576" y="4160520"/>
-            <a:ext cx="2194560" cy="365760"/>
-          </a:xfrm>
-          <a:prstGeom prst="rect">
-            <a:avLst/>
-          </a:prstGeom>
-          <a:noFill/>
-          <a:ln/>
-        </p:spPr>
-        <p:txBody>
-          <a:bodyPr wrap="square" lIns="0" tIns="0" rIns="0" bIns="0" rtlCol="0" anchor="t"/>
-          <a:lstStyle/>
-          <a:p>
-            <a:pPr indent="0" marL="0">
-              <a:buNone/>
-            </a:pPr>
-            <a:r>
-              <a:rPr lang="en-US" sz="1700" b="1" dirty="0">
-                <a:solidFill>
-                  <a:srgbClr val="22396F"/>
-                </a:solidFill>
-                <a:latin typeface="Courier New" pitchFamily="34" charset="0"/>
-                <a:ea typeface="Courier New" pitchFamily="34" charset="-122"/>
-                <a:cs typeface="Courier New" pitchFamily="34" charset="-120"/>
-              </a:rPr>
-              <a:t>script.js</a:t>
-            </a:r>
-            <a:endParaRPr lang="en-US" sz="1700" dirty="0"/>
-          </a:p>
-        </p:txBody>
-      </p:sp>
-      <p:sp>
-        <p:nvSpPr>
-          <p:cNvPr id="34" name="Text 32"/>
-          <p:cNvSpPr txBox="1"/>
-          <p:nvPr/>
-        </p:nvSpPr>
-        <p:spPr>
-          <a:xfrm>
-            <a:off x="9180576" y="4617720"/>
-            <a:ext cx="2194560" cy="822960"/>
-          </a:xfrm>
-          <a:prstGeom prst="rect">
-            <a:avLst/>
-          </a:prstGeom>
-          <a:noFill/>
-          <a:ln/>
-        </p:spPr>
-        <p:txBody>
-          <a:bodyPr wrap="square" lIns="0" tIns="0" rIns="0" bIns="0" rtlCol="0" anchor="t"/>
-          <a:lstStyle/>
-          <a:p>
-            <a:pPr indent="0" marL="0">
-              <a:buNone/>
-            </a:pPr>
-            <a:r>
-              <a:rPr lang="en-US" sz="1500" dirty="0">
-                <a:solidFill>
-                  <a:srgbClr val="0D1C42"/>
-                </a:solidFill>
-                <a:latin typeface="Calibri" pitchFamily="34" charset="0"/>
-                <a:ea typeface="Calibri" pitchFamily="34" charset="-122"/>
-                <a:cs typeface="Calibri" pitchFamily="34" charset="-120"/>
-              </a:rPr>
-              <a:t>Lógica: API, DOM e eventos</a:t>
+              <a:t>Toda falha vira um ApiError com mensagem clara.</a:t>
             </a:r>
             <a:endParaRPr lang="en-US" sz="1500" dirty="0"/>
           </a:p>
@@ -4296,7 +3841,7 @@
                 <a:ea typeface="Cambria" pitchFamily="34" charset="-122"/>
                 <a:cs typeface="Cambria" pitchFamily="34" charset="-120"/>
               </a:rPr>
-              <a:t>Chamadas assíncronas</a:t>
+              <a:t>DOM, eventos e escopo</a:t>
             </a:r>
             <a:endParaRPr lang="en-US" sz="3800" dirty="0"/>
           </a:p>
@@ -4311,19 +3856,19 @@
         <p:spPr>
           <a:xfrm>
             <a:off x="640080" y="1554480"/>
-            <a:ext cx="6949440" cy="4526280"/>
+            <a:ext cx="3474720" cy="4526280"/>
           </a:xfrm>
           <a:prstGeom prst="roundRect">
             <a:avLst>
-              <a:gd name="adj" fmla="val 2424"/>
+              <a:gd name="adj" fmla="val 3158"/>
             </a:avLst>
           </a:prstGeom>
           <a:solidFill>
-            <a:srgbClr val="010736"/>
+            <a:srgbClr val="FFFAEA"/>
           </a:solidFill>
           <a:ln w="12700">
             <a:solidFill>
-              <a:srgbClr val="010736"/>
+              <a:srgbClr val="FFFAEA"/>
             </a:solidFill>
             <a:prstDash val="solid"/>
           </a:ln>
@@ -4338,376 +3883,14 @@
       </p:sp>
       <p:sp>
         <p:nvSpPr>
-          <p:cNvPr id="4" name="Text 2"/>
-          <p:cNvSpPr txBox="1"/>
-          <p:nvPr/>
-        </p:nvSpPr>
-        <p:spPr>
-          <a:xfrm>
-            <a:off x="868680" y="1783080"/>
-            <a:ext cx="6583680" cy="4069080"/>
-          </a:xfrm>
-          <a:prstGeom prst="rect">
-            <a:avLst/>
-          </a:prstGeom>
-          <a:noFill/>
-          <a:ln/>
-        </p:spPr>
-        <p:txBody>
-          <a:bodyPr wrap="square" lIns="0" tIns="0" rIns="0" bIns="0" rtlCol="0" anchor="t"/>
-          <a:lstStyle/>
-          <a:p>
-            <a:pPr indent="0" marL="0">
-              <a:spcAft>
-                <a:spcPts val="400"/>
-              </a:spcAft>
-              <a:buNone/>
-            </a:pPr>
-            <a:r>
-              <a:rPr lang="en-US" sz="1300" dirty="0">
-                <a:solidFill>
-                  <a:srgbClr val="FCF1D0"/>
-                </a:solidFill>
-                <a:latin typeface="Courier New" pitchFamily="34" charset="0"/>
-                <a:ea typeface="Courier New" pitchFamily="34" charset="-122"/>
-                <a:cs typeface="Courier New" pitchFamily="34" charset="-120"/>
-              </a:rPr>
-              <a:t>async function request(path, params) {</a:t>
-            </a:r>
-            <a:endParaRPr lang="en-US" sz="1300" dirty="0"/>
-          </a:p>
-          <a:p>
-            <a:pPr indent="0" marL="0">
-              <a:spcAft>
-                <a:spcPts val="400"/>
-              </a:spcAft>
-              <a:buNone/>
-            </a:pPr>
-            <a:r>
-              <a:rPr lang="en-US" sz="1300" dirty="0">
-                <a:solidFill>
-                  <a:srgbClr val="FCF1D0"/>
-                </a:solidFill>
-                <a:latin typeface="Courier New" pitchFamily="34" charset="0"/>
-                <a:ea typeface="Courier New" pitchFamily="34" charset="-122"/>
-                <a:cs typeface="Courier New" pitchFamily="34" charset="-120"/>
-              </a:rPr>
-              <a:t>  const url = new URL(CONFIG.BASE_URL + path);</a:t>
-            </a:r>
-            <a:endParaRPr lang="en-US" sz="1300" dirty="0"/>
-          </a:p>
-          <a:p>
-            <a:pPr indent="0" marL="0">
-              <a:spcAft>
-                <a:spcPts val="400"/>
-              </a:spcAft>
-              <a:buNone/>
-            </a:pPr>
-            <a:r>
-              <a:rPr lang="en-US" sz="1300" dirty="0">
-                <a:solidFill>
-                  <a:srgbClr val="FCF1D0"/>
-                </a:solidFill>
-                <a:latin typeface="Courier New" pitchFamily="34" charset="0"/>
-                <a:ea typeface="Courier New" pitchFamily="34" charset="-122"/>
-                <a:cs typeface="Courier New" pitchFamily="34" charset="-120"/>
-              </a:rPr>
-              <a:t>  url.search = new URLSearchParams({ ...params, apiKey });</a:t>
-            </a:r>
-            <a:endParaRPr lang="en-US" sz="1300" dirty="0"/>
-          </a:p>
-          <a:p>
-            <a:pPr indent="0" marL="0">
-              <a:spcAft>
-                <a:spcPts val="400"/>
-              </a:spcAft>
-              <a:buNone/>
-            </a:pPr>
-            <a:r>
-              <a:rPr lang="en-US" sz="1300" dirty="0">
-                <a:solidFill>
-                  <a:srgbClr val="FCF1D0"/>
-                </a:solidFill>
-                <a:latin typeface="Courier New" pitchFamily="34" charset="0"/>
-                <a:ea typeface="Courier New" pitchFamily="34" charset="-122"/>
-                <a:cs typeface="Courier New" pitchFamily="34" charset="-120"/>
-              </a:rPr>
-              <a:t> </a:t>
-            </a:r>
-            <a:endParaRPr lang="en-US" sz="1300" dirty="0"/>
-          </a:p>
-          <a:p>
-            <a:pPr indent="0" marL="0">
-              <a:spcAft>
-                <a:spcPts val="400"/>
-              </a:spcAft>
-              <a:buNone/>
-            </a:pPr>
-            <a:r>
-              <a:rPr lang="en-US" sz="1300" dirty="0">
-                <a:solidFill>
-                  <a:srgbClr val="FCF1D0"/>
-                </a:solidFill>
-                <a:latin typeface="Courier New" pitchFamily="34" charset="0"/>
-                <a:ea typeface="Courier New" pitchFamily="34" charset="-122"/>
-                <a:cs typeface="Courier New" pitchFamily="34" charset="-120"/>
-              </a:rPr>
-              <a:t>  const controller = new AbortController();</a:t>
-            </a:r>
-            <a:endParaRPr lang="en-US" sz="1300" dirty="0"/>
-          </a:p>
-          <a:p>
-            <a:pPr indent="0" marL="0">
-              <a:spcAft>
-                <a:spcPts val="400"/>
-              </a:spcAft>
-              <a:buNone/>
-            </a:pPr>
-            <a:r>
-              <a:rPr lang="en-US" sz="1300" dirty="0">
-                <a:solidFill>
-                  <a:srgbClr val="FCF1D0"/>
-                </a:solidFill>
-                <a:latin typeface="Courier New" pitchFamily="34" charset="0"/>
-                <a:ea typeface="Courier New" pitchFamily="34" charset="-122"/>
-                <a:cs typeface="Courier New" pitchFamily="34" charset="-120"/>
-              </a:rPr>
-              <a:t>  const timer = setTimeout(() =&gt; controller.abort(), 10000);</a:t>
-            </a:r>
-            <a:endParaRPr lang="en-US" sz="1300" dirty="0"/>
-          </a:p>
-          <a:p>
-            <a:pPr indent="0" marL="0">
-              <a:spcAft>
-                <a:spcPts val="400"/>
-              </a:spcAft>
-              <a:buNone/>
-            </a:pPr>
-            <a:r>
-              <a:rPr lang="en-US" sz="1300" dirty="0">
-                <a:solidFill>
-                  <a:srgbClr val="FCF1D0"/>
-                </a:solidFill>
-                <a:latin typeface="Courier New" pitchFamily="34" charset="0"/>
-                <a:ea typeface="Courier New" pitchFamily="34" charset="-122"/>
-                <a:cs typeface="Courier New" pitchFamily="34" charset="-120"/>
-              </a:rPr>
-              <a:t> </a:t>
-            </a:r>
-            <a:endParaRPr lang="en-US" sz="1300" dirty="0"/>
-          </a:p>
-          <a:p>
-            <a:pPr indent="0" marL="0">
-              <a:spcAft>
-                <a:spcPts val="400"/>
-              </a:spcAft>
-              <a:buNone/>
-            </a:pPr>
-            <a:r>
-              <a:rPr lang="en-US" sz="1300" dirty="0">
-                <a:solidFill>
-                  <a:srgbClr val="FCF1D0"/>
-                </a:solidFill>
-                <a:latin typeface="Courier New" pitchFamily="34" charset="0"/>
-                <a:ea typeface="Courier New" pitchFamily="34" charset="-122"/>
-                <a:cs typeface="Courier New" pitchFamily="34" charset="-120"/>
-              </a:rPr>
-              <a:t>  try {</a:t>
-            </a:r>
-            <a:endParaRPr lang="en-US" sz="1300" dirty="0"/>
-          </a:p>
-          <a:p>
-            <a:pPr indent="0" marL="0">
-              <a:spcAft>
-                <a:spcPts val="400"/>
-              </a:spcAft>
-              <a:buNone/>
-            </a:pPr>
-            <a:r>
-              <a:rPr lang="en-US" sz="1300" dirty="0">
-                <a:solidFill>
-                  <a:srgbClr val="FCF1D0"/>
-                </a:solidFill>
-                <a:latin typeface="Courier New" pitchFamily="34" charset="0"/>
-                <a:ea typeface="Courier New" pitchFamily="34" charset="-122"/>
-                <a:cs typeface="Courier New" pitchFamily="34" charset="-120"/>
-              </a:rPr>
-              <a:t>    const res = await fetch(url, { signal: controller.signal });</a:t>
-            </a:r>
-            <a:endParaRPr lang="en-US" sz="1300" dirty="0"/>
-          </a:p>
-          <a:p>
-            <a:pPr indent="0" marL="0">
-              <a:spcAft>
-                <a:spcPts val="400"/>
-              </a:spcAft>
-              <a:buNone/>
-            </a:pPr>
-            <a:r>
-              <a:rPr lang="en-US" sz="1300" dirty="0">
-                <a:solidFill>
-                  <a:srgbClr val="FCF1D0"/>
-                </a:solidFill>
-                <a:latin typeface="Courier New" pitchFamily="34" charset="0"/>
-                <a:ea typeface="Courier New" pitchFamily="34" charset="-122"/>
-                <a:cs typeface="Courier New" pitchFamily="34" charset="-120"/>
-              </a:rPr>
-              <a:t>    if (!res.ok) throw new ApiError(messageFor(res.status));</a:t>
-            </a:r>
-            <a:endParaRPr lang="en-US" sz="1300" dirty="0"/>
-          </a:p>
-          <a:p>
-            <a:pPr indent="0" marL="0">
-              <a:spcAft>
-                <a:spcPts val="400"/>
-              </a:spcAft>
-              <a:buNone/>
-            </a:pPr>
-            <a:r>
-              <a:rPr lang="en-US" sz="1300" dirty="0">
-                <a:solidFill>
-                  <a:srgbClr val="FCF1D0"/>
-                </a:solidFill>
-                <a:latin typeface="Courier New" pitchFamily="34" charset="0"/>
-                <a:ea typeface="Courier New" pitchFamily="34" charset="-122"/>
-                <a:cs typeface="Courier New" pitchFamily="34" charset="-120"/>
-              </a:rPr>
-              <a:t>    return await res.json();</a:t>
-            </a:r>
-            <a:endParaRPr lang="en-US" sz="1300" dirty="0"/>
-          </a:p>
-          <a:p>
-            <a:pPr indent="0" marL="0">
-              <a:spcAft>
-                <a:spcPts val="400"/>
-              </a:spcAft>
-              <a:buNone/>
-            </a:pPr>
-            <a:r>
-              <a:rPr lang="en-US" sz="1300" dirty="0">
-                <a:solidFill>
-                  <a:srgbClr val="FCF1D0"/>
-                </a:solidFill>
-                <a:latin typeface="Courier New" pitchFamily="34" charset="0"/>
-                <a:ea typeface="Courier New" pitchFamily="34" charset="-122"/>
-                <a:cs typeface="Courier New" pitchFamily="34" charset="-120"/>
-              </a:rPr>
-              <a:t>  } catch (err) {</a:t>
-            </a:r>
-            <a:endParaRPr lang="en-US" sz="1300" dirty="0"/>
-          </a:p>
-          <a:p>
-            <a:pPr indent="0" marL="0">
-              <a:spcAft>
-                <a:spcPts val="400"/>
-              </a:spcAft>
-              <a:buNone/>
-            </a:pPr>
-            <a:r>
-              <a:rPr lang="en-US" sz="1300" dirty="0">
-                <a:solidFill>
-                  <a:srgbClr val="9DB2E8"/>
-                </a:solidFill>
-                <a:latin typeface="Courier New" pitchFamily="34" charset="0"/>
-                <a:ea typeface="Courier New" pitchFamily="34" charset="-122"/>
-                <a:cs typeface="Courier New" pitchFamily="34" charset="-120"/>
-              </a:rPr>
-              <a:t>    // traduz falhas em mensagens amigáveis</a:t>
-            </a:r>
-            <a:endParaRPr lang="en-US" sz="1300" dirty="0"/>
-          </a:p>
-          <a:p>
-            <a:pPr indent="0" marL="0">
-              <a:spcAft>
-                <a:spcPts val="400"/>
-              </a:spcAft>
-              <a:buNone/>
-            </a:pPr>
-            <a:r>
-              <a:rPr lang="en-US" sz="1300" dirty="0">
-                <a:solidFill>
-                  <a:srgbClr val="FCF1D0"/>
-                </a:solidFill>
-                <a:latin typeface="Courier New" pitchFamily="34" charset="0"/>
-                <a:ea typeface="Courier New" pitchFamily="34" charset="-122"/>
-                <a:cs typeface="Courier New" pitchFamily="34" charset="-120"/>
-              </a:rPr>
-              <a:t>  } finally {</a:t>
-            </a:r>
-            <a:endParaRPr lang="en-US" sz="1300" dirty="0"/>
-          </a:p>
-          <a:p>
-            <a:pPr indent="0" marL="0">
-              <a:spcAft>
-                <a:spcPts val="400"/>
-              </a:spcAft>
-              <a:buNone/>
-            </a:pPr>
-            <a:r>
-              <a:rPr lang="en-US" sz="1300" dirty="0">
-                <a:solidFill>
-                  <a:srgbClr val="FCF1D0"/>
-                </a:solidFill>
-                <a:latin typeface="Courier New" pitchFamily="34" charset="0"/>
-                <a:ea typeface="Courier New" pitchFamily="34" charset="-122"/>
-                <a:cs typeface="Courier New" pitchFamily="34" charset="-120"/>
-              </a:rPr>
-              <a:t>    clearTimeout(timer);</a:t>
-            </a:r>
-            <a:endParaRPr lang="en-US" sz="1300" dirty="0"/>
-          </a:p>
-          <a:p>
-            <a:pPr indent="0" marL="0">
-              <a:spcAft>
-                <a:spcPts val="400"/>
-              </a:spcAft>
-              <a:buNone/>
-            </a:pPr>
-            <a:r>
-              <a:rPr lang="en-US" sz="1300" dirty="0">
-                <a:solidFill>
-                  <a:srgbClr val="FCF1D0"/>
-                </a:solidFill>
-                <a:latin typeface="Courier New" pitchFamily="34" charset="0"/>
-                <a:ea typeface="Courier New" pitchFamily="34" charset="-122"/>
-                <a:cs typeface="Courier New" pitchFamily="34" charset="-120"/>
-              </a:rPr>
-              <a:t>  }</a:t>
-            </a:r>
-            <a:endParaRPr lang="en-US" sz="1300" dirty="0"/>
-          </a:p>
-          <a:p>
-            <a:pPr indent="0" marL="0">
-              <a:spcAft>
-                <a:spcPts val="400"/>
-              </a:spcAft>
-              <a:buNone/>
-            </a:pPr>
-            <a:r>
-              <a:rPr lang="en-US" sz="1300" dirty="0">
-                <a:solidFill>
-                  <a:srgbClr val="FCF1D0"/>
-                </a:solidFill>
-                <a:latin typeface="Courier New" pitchFamily="34" charset="0"/>
-                <a:ea typeface="Courier New" pitchFamily="34" charset="-122"/>
-                <a:cs typeface="Courier New" pitchFamily="34" charset="-120"/>
-              </a:rPr>
-              <a:t>}</a:t>
-            </a:r>
-            <a:endParaRPr lang="en-US" sz="1300" dirty="0"/>
-          </a:p>
-        </p:txBody>
-      </p:sp>
-      <p:sp>
-        <p:nvSpPr>
-          <p:cNvPr id="5" name="Shape 3"/>
+          <p:cNvPr id="4" name="Shape 2"/>
           <p:cNvSpPr/>
           <p:nvPr/>
         </p:nvSpPr>
         <p:spPr>
           <a:xfrm>
-            <a:off x="7955280" y="1645920"/>
-            <a:ext cx="685800" cy="685800"/>
+            <a:off x="914400" y="1783080"/>
+            <a:ext cx="731520" cy="731520"/>
           </a:xfrm>
           <a:prstGeom prst="ellipse">
             <a:avLst/>
@@ -4725,7 +3908,7 @@
       </p:sp>
       <p:pic>
         <p:nvPicPr>
-          <p:cNvPr id="6" name="Image 0" descr="preencoded.png">    </p:cNvPr>
+          <p:cNvPr id="5" name="Image 0" descr="preencoded.png">    </p:cNvPr>
           <p:cNvPicPr>
             <a:picLocks noChangeAspect="1"/>
           </p:cNvPicPr>
@@ -4739,14 +3922,53 @@
         </p:blipFill>
         <p:spPr>
           <a:xfrm>
-            <a:off x="8126730" y="1817370"/>
-            <a:ext cx="342900" cy="342900"/>
+            <a:off x="1097280" y="1965960"/>
+            <a:ext cx="365760" cy="365760"/>
           </a:xfrm>
           <a:prstGeom prst="rect">
             <a:avLst/>
           </a:prstGeom>
         </p:spPr>
       </p:pic>
+      <p:sp>
+        <p:nvSpPr>
+          <p:cNvPr id="6" name="Text 3"/>
+          <p:cNvSpPr txBox="1"/>
+          <p:nvPr/>
+        </p:nvSpPr>
+        <p:spPr>
+          <a:xfrm>
+            <a:off x="914400" y="2697480"/>
+            <a:ext cx="3017520" cy="457200"/>
+          </a:xfrm>
+          <a:prstGeom prst="rect">
+            <a:avLst/>
+          </a:prstGeom>
+          <a:noFill/>
+          <a:ln/>
+        </p:spPr>
+        <p:txBody>
+          <a:bodyPr wrap="square" lIns="0" tIns="0" rIns="0" bIns="0" rtlCol="0" anchor="t"/>
+          <a:lstStyle/>
+          <a:p>
+            <a:pPr indent="0" marL="0">
+              <a:buNone/>
+            </a:pPr>
+            <a:r>
+              <a:rPr lang="en-US" sz="2200" b="1" dirty="0">
+                <a:solidFill>
+                  <a:srgbClr val="010736"/>
+                </a:solidFill>
+                <a:latin typeface="Cambria" pitchFamily="34" charset="0"/>
+                <a:ea typeface="Cambria" pitchFamily="34" charset="-122"/>
+                <a:cs typeface="Cambria" pitchFamily="34" charset="-120"/>
+              </a:rPr>
+              <a:t>Manipulação do DOM</a:t>
+            </a:r>
+            <a:endParaRPr lang="en-US" sz="2200" dirty="0"/>
+          </a:p>
+        </p:txBody>
+      </p:sp>
       <p:sp>
         <p:nvSpPr>
           <p:cNvPr id="7" name="Text 4"/>
@@ -4755,8 +3977,8 @@
         </p:nvSpPr>
         <p:spPr>
           <a:xfrm>
-            <a:off x="8823960" y="1600200"/>
-            <a:ext cx="2743200" cy="411480"/>
+            <a:off x="914400" y="3291840"/>
+            <a:ext cx="3017520" cy="2651760"/>
           </a:xfrm>
           <a:prstGeom prst="rect">
             <a:avLst/>
@@ -4768,50 +3990,36 @@
           <a:bodyPr wrap="square" lIns="0" tIns="0" rIns="0" bIns="0" rtlCol="0" anchor="t"/>
           <a:lstStyle/>
           <a:p>
-            <a:pPr indent="0" marL="0">
-              <a:buNone/>
-            </a:pPr>
-            <a:r>
-              <a:rPr lang="en-US" sz="2000" b="1" dirty="0">
-                <a:solidFill>
-                  <a:srgbClr val="010736"/>
+            <a:pPr marL="342900" indent="-342900">
+              <a:spcAft>
+                <a:spcPts val="1200"/>
+              </a:spcAft>
+              <a:buSzPct val="100000"/>
+              <a:buChar char="•"/>
+            </a:pPr>
+            <a:r>
+              <a:rPr lang="en-US" sz="1700" dirty="0">
+                <a:solidFill>
+                  <a:srgbClr val="0D1C42"/>
                 </a:solidFill>
                 <a:latin typeface="Calibri" pitchFamily="34" charset="0"/>
                 <a:ea typeface="Calibri" pitchFamily="34" charset="-122"/>
                 <a:cs typeface="Calibri" pitchFamily="34" charset="-120"/>
               </a:rPr>
-              <a:t>async/await</a:t>
-            </a:r>
-            <a:endParaRPr lang="en-US" sz="2000" dirty="0"/>
-          </a:p>
-        </p:txBody>
-      </p:sp>
-      <p:sp>
-        <p:nvSpPr>
-          <p:cNvPr id="8" name="Text 5"/>
-          <p:cNvSpPr txBox="1"/>
-          <p:nvPr/>
-        </p:nvSpPr>
-        <p:spPr>
-          <a:xfrm>
-            <a:off x="8823960" y="2057400"/>
-            <a:ext cx="2743200" cy="868680"/>
-          </a:xfrm>
-          <a:prstGeom prst="rect">
-            <a:avLst/>
-          </a:prstGeom>
-          <a:noFill/>
-          <a:ln/>
-        </p:spPr>
-        <p:txBody>
-          <a:bodyPr wrap="square" lIns="0" tIns="0" rIns="0" bIns="0" rtlCol="0" anchor="t"/>
-          <a:lstStyle/>
-          <a:p>
-            <a:pPr indent="0" marL="0">
-              <a:buNone/>
-            </a:pPr>
-            <a:r>
-              <a:rPr lang="en-US" sz="1500" dirty="0">
+              <a:t>Função h() cria os elementos</a:t>
+            </a:r>
+            <a:endParaRPr lang="en-US" sz="1700" dirty="0"/>
+          </a:p>
+          <a:p>
+            <a:pPr marL="342900" indent="-342900">
+              <a:spcAft>
+                <a:spcPts val="1200"/>
+              </a:spcAft>
+              <a:buSzPct val="100000"/>
+              <a:buChar char="•"/>
+            </a:pPr>
+            <a:r>
+              <a:rPr lang="en-US" sz="1700" dirty="0">
                 <a:solidFill>
                   <a:srgbClr val="0D1C42"/>
                 </a:solidFill>
@@ -4819,11 +4027,87 @@
                 <a:ea typeface="Calibri" pitchFamily="34" charset="-122"/>
                 <a:cs typeface="Calibri" pitchFamily="34" charset="-120"/>
               </a:rPr>
-              <a:t>O código espera a resposta sem travar a página.</a:t>
-            </a:r>
-            <a:endParaRPr lang="en-US" sz="1500" dirty="0"/>
-          </a:p>
-        </p:txBody>
+              <a:t>textContent evita injeção de HTML</a:t>
+            </a:r>
+            <a:endParaRPr lang="en-US" sz="1700" dirty="0"/>
+          </a:p>
+          <a:p>
+            <a:pPr marL="342900" indent="-342900">
+              <a:spcAft>
+                <a:spcPts val="1200"/>
+              </a:spcAft>
+              <a:buSzPct val="100000"/>
+              <a:buChar char="•"/>
+            </a:pPr>
+            <a:r>
+              <a:rPr lang="en-US" sz="1700" dirty="0">
+                <a:solidFill>
+                  <a:srgbClr val="0D1C42"/>
+                </a:solidFill>
+                <a:latin typeface="Calibri" pitchFamily="34" charset="0"/>
+                <a:ea typeface="Calibri" pitchFamily="34" charset="-122"/>
+                <a:cs typeface="Calibri" pitchFamily="34" charset="-120"/>
+              </a:rPr>
+              <a:t>replaceChildren redesenha chips e cards</a:t>
+            </a:r>
+            <a:endParaRPr lang="en-US" sz="1700" dirty="0"/>
+          </a:p>
+          <a:p>
+            <a:pPr marL="342900" indent="-342900">
+              <a:spcAft>
+                <a:spcPts val="1200"/>
+              </a:spcAft>
+              <a:buSzPct val="100000"/>
+              <a:buChar char="•"/>
+            </a:pPr>
+            <a:r>
+              <a:rPr lang="en-US" sz="1700" dirty="0">
+                <a:solidFill>
+                  <a:srgbClr val="0D1C42"/>
+                </a:solidFill>
+                <a:latin typeface="Calibri" pitchFamily="34" charset="0"/>
+                <a:ea typeface="Calibri" pitchFamily="34" charset="-122"/>
+                <a:cs typeface="Calibri" pitchFamily="34" charset="-120"/>
+              </a:rPr>
+              <a:t>Modal com o elemento &lt;dialog&gt;</a:t>
+            </a:r>
+            <a:endParaRPr lang="en-US" sz="1700" dirty="0"/>
+          </a:p>
+        </p:txBody>
+      </p:sp>
+      <p:sp>
+        <p:nvSpPr>
+          <p:cNvPr id="8" name="Shape 5"/>
+          <p:cNvSpPr/>
+          <p:nvPr/>
+        </p:nvSpPr>
+        <p:spPr>
+          <a:xfrm>
+            <a:off x="4343400" y="1554480"/>
+            <a:ext cx="3474720" cy="4526280"/>
+          </a:xfrm>
+          <a:prstGeom prst="roundRect">
+            <a:avLst>
+              <a:gd name="adj" fmla="val 3158"/>
+            </a:avLst>
+          </a:prstGeom>
+          <a:solidFill>
+            <a:srgbClr val="FFFAEA"/>
+          </a:solidFill>
+          <a:ln w="12700">
+            <a:solidFill>
+              <a:srgbClr val="FFFAEA"/>
+            </a:solidFill>
+            <a:prstDash val="solid"/>
+          </a:ln>
+          <a:effectLst>
+            <a:outerShdw sx="100000" sy="100000" kx="0" ky="0" algn="bl" rotWithShape="0" blurRad="101600" dist="25400" dir="5400000">
+              <a:srgbClr val="000000">
+                <a:alpha val="15000"/>
+              </a:srgbClr>
+            </a:outerShdw>
+          </a:effectLst>
+        </p:spPr>
       </p:sp>
       <p:sp>
         <p:nvSpPr>
@@ -4833,8 +4117,8 @@
         </p:nvSpPr>
         <p:spPr>
           <a:xfrm>
-            <a:off x="7955280" y="3200400"/>
-            <a:ext cx="685800" cy="685800"/>
+            <a:off x="4617720" y="1783080"/>
+            <a:ext cx="731520" cy="731520"/>
           </a:xfrm>
           <a:prstGeom prst="ellipse">
             <a:avLst/>
@@ -4866,8 +4150,8 @@
         </p:blipFill>
         <p:spPr>
           <a:xfrm>
-            <a:off x="8126730" y="3371850"/>
-            <a:ext cx="342900" cy="342900"/>
+            <a:off x="4800600" y="1965960"/>
+            <a:ext cx="365760" cy="365760"/>
           </a:xfrm>
           <a:prstGeom prst="rect">
             <a:avLst/>
@@ -4882,8 +4166,8 @@
         </p:nvSpPr>
         <p:spPr>
           <a:xfrm>
-            <a:off x="8823960" y="3154680"/>
-            <a:ext cx="2743200" cy="411480"/>
+            <a:off x="4617720" y="2697480"/>
+            <a:ext cx="3017520" cy="457200"/>
           </a:xfrm>
           <a:prstGeom prst="rect">
             <a:avLst/>
@@ -4899,46 +4183,71 @@
               <a:buNone/>
             </a:pPr>
             <a:r>
-              <a:rPr lang="en-US" sz="2000" b="1" dirty="0">
+              <a:rPr lang="en-US" sz="2200" b="1" dirty="0">
                 <a:solidFill>
                   <a:srgbClr val="010736"/>
+                </a:solidFill>
+                <a:latin typeface="Cambria" pitchFamily="34" charset="0"/>
+                <a:ea typeface="Cambria" pitchFamily="34" charset="-122"/>
+                <a:cs typeface="Cambria" pitchFamily="34" charset="-120"/>
+              </a:rPr>
+              <a:t>Eventos</a:t>
+            </a:r>
+            <a:endParaRPr lang="en-US" sz="2200" dirty="0"/>
+          </a:p>
+        </p:txBody>
+      </p:sp>
+      <p:sp>
+        <p:nvSpPr>
+          <p:cNvPr id="12" name="Text 8"/>
+          <p:cNvSpPr txBox="1"/>
+          <p:nvPr/>
+        </p:nvSpPr>
+        <p:spPr>
+          <a:xfrm>
+            <a:off x="4617720" y="3291840"/>
+            <a:ext cx="3017520" cy="2651760"/>
+          </a:xfrm>
+          <a:prstGeom prst="rect">
+            <a:avLst/>
+          </a:prstGeom>
+          <a:noFill/>
+          <a:ln/>
+        </p:spPr>
+        <p:txBody>
+          <a:bodyPr wrap="square" lIns="0" tIns="0" rIns="0" bIns="0" rtlCol="0" anchor="t"/>
+          <a:lstStyle/>
+          <a:p>
+            <a:pPr marL="342900" indent="-342900">
+              <a:spcAft>
+                <a:spcPts val="1200"/>
+              </a:spcAft>
+              <a:buSzPct val="100000"/>
+              <a:buChar char="•"/>
+            </a:pPr>
+            <a:r>
+              <a:rPr lang="en-US" sz="1700" dirty="0">
+                <a:solidFill>
+                  <a:srgbClr val="0D1C42"/>
                 </a:solidFill>
                 <a:latin typeface="Calibri" pitchFamily="34" charset="0"/>
                 <a:ea typeface="Calibri" pitchFamily="34" charset="-122"/>
                 <a:cs typeface="Calibri" pitchFamily="34" charset="-120"/>
               </a:rPr>
-              <a:t>AbortController</a:t>
-            </a:r>
-            <a:endParaRPr lang="en-US" sz="2000" dirty="0"/>
-          </a:p>
-        </p:txBody>
-      </p:sp>
-      <p:sp>
-        <p:nvSpPr>
-          <p:cNvPr id="12" name="Text 8"/>
-          <p:cNvSpPr txBox="1"/>
-          <p:nvPr/>
-        </p:nvSpPr>
-        <p:spPr>
-          <a:xfrm>
-            <a:off x="8823960" y="3611880"/>
-            <a:ext cx="2743200" cy="868680"/>
-          </a:xfrm>
-          <a:prstGeom prst="rect">
-            <a:avLst/>
-          </a:prstGeom>
-          <a:noFill/>
-          <a:ln/>
-        </p:spPr>
-        <p:txBody>
-          <a:bodyPr wrap="square" lIns="0" tIns="0" rIns="0" bIns="0" rtlCol="0" anchor="t"/>
-          <a:lstStyle/>
-          <a:p>
-            <a:pPr indent="0" marL="0">
-              <a:buNone/>
-            </a:pPr>
-            <a:r>
-              <a:rPr lang="en-US" sz="1500" dirty="0">
+              <a:t>click: adicionar, remover e ver receita</a:t>
+            </a:r>
+            <a:endParaRPr lang="en-US" sz="1700" dirty="0"/>
+          </a:p>
+          <a:p>
+            <a:pPr marL="342900" indent="-342900">
+              <a:spcAft>
+                <a:spcPts val="1200"/>
+              </a:spcAft>
+              <a:buSzPct val="100000"/>
+              <a:buChar char="•"/>
+            </a:pPr>
+            <a:r>
+              <a:rPr lang="en-US" sz="1700" dirty="0">
                 <a:solidFill>
                   <a:srgbClr val="0D1C42"/>
                 </a:solidFill>
@@ -4946,9 +4255,51 @@
                 <a:ea typeface="Calibri" pitchFamily="34" charset="-122"/>
                 <a:cs typeface="Calibri" pitchFamily="34" charset="-120"/>
               </a:rPr>
-              <a:t>Cancela a busca se a API passar de 10 segundos.</a:t>
-            </a:r>
-            <a:endParaRPr lang="en-US" sz="1500" dirty="0"/>
+              <a:t>keydown: Enter adiciona o ingrediente</a:t>
+            </a:r>
+            <a:endParaRPr lang="en-US" sz="1700" dirty="0"/>
+          </a:p>
+          <a:p>
+            <a:pPr marL="342900" indent="-342900">
+              <a:spcAft>
+                <a:spcPts val="1200"/>
+              </a:spcAft>
+              <a:buSzPct val="100000"/>
+              <a:buChar char="•"/>
+            </a:pPr>
+            <a:r>
+              <a:rPr lang="en-US" sz="1700" dirty="0">
+                <a:solidFill>
+                  <a:srgbClr val="0D1C42"/>
+                </a:solidFill>
+                <a:latin typeface="Calibri" pitchFamily="34" charset="0"/>
+                <a:ea typeface="Calibri" pitchFamily="34" charset="-122"/>
+                <a:cs typeface="Calibri" pitchFamily="34" charset="-120"/>
+              </a:rPr>
+              <a:t>submit: dispara a busca</a:t>
+            </a:r>
+            <a:endParaRPr lang="en-US" sz="1700" dirty="0"/>
+          </a:p>
+          <a:p>
+            <a:pPr marL="342900" indent="-342900">
+              <a:spcAft>
+                <a:spcPts val="1200"/>
+              </a:spcAft>
+              <a:buSzPct val="100000"/>
+              <a:buChar char="•"/>
+            </a:pPr>
+            <a:r>
+              <a:rPr lang="en-US" sz="1700" dirty="0">
+                <a:solidFill>
+                  <a:srgbClr val="0D1C42"/>
+                </a:solidFill>
+                <a:latin typeface="Calibri" pitchFamily="34" charset="0"/>
+                <a:ea typeface="Calibri" pitchFamily="34" charset="-122"/>
+                <a:cs typeface="Calibri" pitchFamily="34" charset="-120"/>
+              </a:rPr>
+              <a:t>online/offline: avisa queda de conexão</a:t>
+            </a:r>
+            <a:endParaRPr lang="en-US" sz="1700" dirty="0"/>
           </a:p>
         </p:txBody>
       </p:sp>
@@ -4960,8 +4311,42 @@
         </p:nvSpPr>
         <p:spPr>
           <a:xfrm>
-            <a:off x="7955280" y="4754880"/>
-            <a:ext cx="685800" cy="685800"/>
+            <a:off x="8046720" y="1554480"/>
+            <a:ext cx="3474720" cy="4526280"/>
+          </a:xfrm>
+          <a:prstGeom prst="roundRect">
+            <a:avLst>
+              <a:gd name="adj" fmla="val 3158"/>
+            </a:avLst>
+          </a:prstGeom>
+          <a:solidFill>
+            <a:srgbClr val="FFFAEA"/>
+          </a:solidFill>
+          <a:ln w="12700">
+            <a:solidFill>
+              <a:srgbClr val="FFFAEA"/>
+            </a:solidFill>
+            <a:prstDash val="solid"/>
+          </a:ln>
+          <a:effectLst>
+            <a:outerShdw sx="100000" sy="100000" kx="0" ky="0" algn="bl" rotWithShape="0" blurRad="101600" dist="25400" dir="5400000">
+              <a:srgbClr val="000000">
+                <a:alpha val="15000"/>
+              </a:srgbClr>
+            </a:outerShdw>
+          </a:effectLst>
+        </p:spPr>
+      </p:sp>
+      <p:sp>
+        <p:nvSpPr>
+          <p:cNvPr id="14" name="Shape 10"/>
+          <p:cNvSpPr/>
+          <p:nvPr/>
+        </p:nvSpPr>
+        <p:spPr>
+          <a:xfrm>
+            <a:off x="8321040" y="1783080"/>
+            <a:ext cx="731520" cy="731520"/>
           </a:xfrm>
           <a:prstGeom prst="ellipse">
             <a:avLst/>
@@ -4979,7 +4364,7 @@
       </p:sp>
       <p:pic>
         <p:nvPicPr>
-          <p:cNvPr id="14" name="Image 2" descr="preencoded.png">    </p:cNvPr>
+          <p:cNvPr id="15" name="Image 2" descr="preencoded.png">    </p:cNvPr>
           <p:cNvPicPr>
             <a:picLocks noChangeAspect="1"/>
           </p:cNvPicPr>
@@ -4993,8 +4378,8 @@
         </p:blipFill>
         <p:spPr>
           <a:xfrm>
-            <a:off x="8126730" y="4926330"/>
-            <a:ext cx="342900" cy="342900"/>
+            <a:off x="8503920" y="1965960"/>
+            <a:ext cx="365760" cy="365760"/>
           </a:xfrm>
           <a:prstGeom prst="rect">
             <a:avLst/>
@@ -5003,14 +4388,14 @@
       </p:pic>
       <p:sp>
         <p:nvSpPr>
-          <p:cNvPr id="15" name="Text 10"/>
+          <p:cNvPr id="16" name="Text 11"/>
           <p:cNvSpPr txBox="1"/>
           <p:nvPr/>
         </p:nvSpPr>
         <p:spPr>
           <a:xfrm>
-            <a:off x="8823960" y="4709160"/>
-            <a:ext cx="2743200" cy="411480"/>
+            <a:off x="8321040" y="2697480"/>
+            <a:ext cx="3017520" cy="457200"/>
           </a:xfrm>
           <a:prstGeom prst="rect">
             <a:avLst/>
@@ -5026,46 +4411,71 @@
               <a:buNone/>
             </a:pPr>
             <a:r>
-              <a:rPr lang="en-US" sz="2000" b="1" dirty="0">
+              <a:rPr lang="en-US" sz="2200" b="1" dirty="0">
                 <a:solidFill>
                   <a:srgbClr val="010736"/>
+                </a:solidFill>
+                <a:latin typeface="Cambria" pitchFamily="34" charset="0"/>
+                <a:ea typeface="Cambria" pitchFamily="34" charset="-122"/>
+                <a:cs typeface="Cambria" pitchFamily="34" charset="-120"/>
+              </a:rPr>
+              <a:t>Escopo</a:t>
+            </a:r>
+            <a:endParaRPr lang="en-US" sz="2200" dirty="0"/>
+          </a:p>
+        </p:txBody>
+      </p:sp>
+      <p:sp>
+        <p:nvSpPr>
+          <p:cNvPr id="17" name="Text 12"/>
+          <p:cNvSpPr txBox="1"/>
+          <p:nvPr/>
+        </p:nvSpPr>
+        <p:spPr>
+          <a:xfrm>
+            <a:off x="8321040" y="3291840"/>
+            <a:ext cx="3017520" cy="2651760"/>
+          </a:xfrm>
+          <a:prstGeom prst="rect">
+            <a:avLst/>
+          </a:prstGeom>
+          <a:noFill/>
+          <a:ln/>
+        </p:spPr>
+        <p:txBody>
+          <a:bodyPr wrap="square" lIns="0" tIns="0" rIns="0" bIns="0" rtlCol="0" anchor="t"/>
+          <a:lstStyle/>
+          <a:p>
+            <a:pPr marL="342900" indent="-342900">
+              <a:spcAft>
+                <a:spcPts val="1200"/>
+              </a:spcAft>
+              <a:buSzPct val="100000"/>
+              <a:buChar char="•"/>
+            </a:pPr>
+            <a:r>
+              <a:rPr lang="en-US" sz="1700" dirty="0">
+                <a:solidFill>
+                  <a:srgbClr val="0D1C42"/>
                 </a:solidFill>
                 <a:latin typeface="Calibri" pitchFamily="34" charset="0"/>
                 <a:ea typeface="Calibri" pitchFamily="34" charset="-122"/>
                 <a:cs typeface="Calibri" pitchFamily="34" charset="-120"/>
               </a:rPr>
-              <a:t>try/catch/finally</a:t>
-            </a:r>
-            <a:endParaRPr lang="en-US" sz="2000" dirty="0"/>
-          </a:p>
-        </p:txBody>
-      </p:sp>
-      <p:sp>
-        <p:nvSpPr>
-          <p:cNvPr id="16" name="Text 11"/>
-          <p:cNvSpPr txBox="1"/>
-          <p:nvPr/>
-        </p:nvSpPr>
-        <p:spPr>
-          <a:xfrm>
-            <a:off x="8823960" y="5166360"/>
-            <a:ext cx="2743200" cy="868680"/>
-          </a:xfrm>
-          <a:prstGeom prst="rect">
-            <a:avLst/>
-          </a:prstGeom>
-          <a:noFill/>
-          <a:ln/>
-        </p:spPr>
-        <p:txBody>
-          <a:bodyPr wrap="square" lIns="0" tIns="0" rIns="0" bIns="0" rtlCol="0" anchor="t"/>
-          <a:lstStyle/>
-          <a:p>
-            <a:pPr indent="0" marL="0">
-              <a:buNone/>
-            </a:pPr>
-            <a:r>
-              <a:rPr lang="en-US" sz="1500" dirty="0">
+              <a:t>state e el declarados uma vez, no topo</a:t>
+            </a:r>
+            <a:endParaRPr lang="en-US" sz="1700" dirty="0"/>
+          </a:p>
+          <a:p>
+            <a:pPr marL="342900" indent="-342900">
+              <a:spcAft>
+                <a:spcPts val="1200"/>
+              </a:spcAft>
+              <a:buSzPct val="100000"/>
+              <a:buChar char="•"/>
+            </a:pPr>
+            <a:r>
+              <a:rPr lang="en-US" sz="1700" dirty="0">
                 <a:solidFill>
                   <a:srgbClr val="0D1C42"/>
                 </a:solidFill>
@@ -5073,9 +4483,51 @@
                 <a:ea typeface="Calibri" pitchFamily="34" charset="-122"/>
                 <a:cs typeface="Calibri" pitchFamily="34" charset="-120"/>
               </a:rPr>
-              <a:t>Toda falha vira um ApiError com mensagem clara.</a:t>
-            </a:r>
-            <a:endParaRPr lang="en-US" sz="1500" dirty="0"/>
+              <a:t>Funções pequenas, um trabalho cada</a:t>
+            </a:r>
+            <a:endParaRPr lang="en-US" sz="1700" dirty="0"/>
+          </a:p>
+          <a:p>
+            <a:pPr marL="342900" indent="-342900">
+              <a:spcAft>
+                <a:spcPts val="1200"/>
+              </a:spcAft>
+              <a:buSzPct val="100000"/>
+              <a:buChar char="•"/>
+            </a:pPr>
+            <a:r>
+              <a:rPr lang="en-US" sz="1700" dirty="0">
+                <a:solidFill>
+                  <a:srgbClr val="0D1C42"/>
+                </a:solidFill>
+                <a:latin typeface="Calibri" pitchFamily="34" charset="0"/>
+                <a:ea typeface="Calibri" pitchFamily="34" charset="-122"/>
+                <a:cs typeface="Calibri" pitchFamily="34" charset="-120"/>
+              </a:rPr>
+              <a:t>requestId ignora respostas antigas</a:t>
+            </a:r>
+            <a:endParaRPr lang="en-US" sz="1700" dirty="0"/>
+          </a:p>
+          <a:p>
+            <a:pPr marL="342900" indent="-342900">
+              <a:spcAft>
+                <a:spcPts val="1200"/>
+              </a:spcAft>
+              <a:buSzPct val="100000"/>
+              <a:buChar char="•"/>
+            </a:pPr>
+            <a:r>
+              <a:rPr lang="en-US" sz="1700" dirty="0">
+                <a:solidFill>
+                  <a:srgbClr val="0D1C42"/>
+                </a:solidFill>
+                <a:latin typeface="Calibri" pitchFamily="34" charset="0"/>
+                <a:ea typeface="Calibri" pitchFamily="34" charset="-122"/>
+                <a:cs typeface="Calibri" pitchFamily="34" charset="-120"/>
+              </a:rPr>
+              <a:t>"use strict" evita variáveis acidentais</a:t>
+            </a:r>
+            <a:endParaRPr lang="en-US" sz="1700" dirty="0"/>
           </a:p>
         </p:txBody>
       </p:sp>
@@ -5144,761 +4596,6 @@
                 <a:ea typeface="Cambria" pitchFamily="34" charset="-122"/>
                 <a:cs typeface="Cambria" pitchFamily="34" charset="-120"/>
               </a:rPr>
-              <a:t>DOM, eventos e escopo</a:t>
-            </a:r>
-            <a:endParaRPr lang="en-US" sz="3800" dirty="0"/>
-          </a:p>
-        </p:txBody>
-      </p:sp>
-      <p:sp>
-        <p:nvSpPr>
-          <p:cNvPr id="3" name="Shape 1"/>
-          <p:cNvSpPr/>
-          <p:nvPr/>
-        </p:nvSpPr>
-        <p:spPr>
-          <a:xfrm>
-            <a:off x="640080" y="1554480"/>
-            <a:ext cx="3474720" cy="4526280"/>
-          </a:xfrm>
-          <a:prstGeom prst="roundRect">
-            <a:avLst>
-              <a:gd name="adj" fmla="val 3158"/>
-            </a:avLst>
-          </a:prstGeom>
-          <a:solidFill>
-            <a:srgbClr val="FFFAEA"/>
-          </a:solidFill>
-          <a:ln w="12700">
-            <a:solidFill>
-              <a:srgbClr val="FFFAEA"/>
-            </a:solidFill>
-            <a:prstDash val="solid"/>
-          </a:ln>
-          <a:effectLst>
-            <a:outerShdw sx="100000" sy="100000" kx="0" ky="0" algn="bl" rotWithShape="0" blurRad="101600" dist="25400" dir="5400000">
-              <a:srgbClr val="000000">
-                <a:alpha val="15000"/>
-              </a:srgbClr>
-            </a:outerShdw>
-          </a:effectLst>
-        </p:spPr>
-      </p:sp>
-      <p:sp>
-        <p:nvSpPr>
-          <p:cNvPr id="4" name="Shape 2"/>
-          <p:cNvSpPr/>
-          <p:nvPr/>
-        </p:nvSpPr>
-        <p:spPr>
-          <a:xfrm>
-            <a:off x="914400" y="1783080"/>
-            <a:ext cx="731520" cy="731520"/>
-          </a:xfrm>
-          <a:prstGeom prst="ellipse">
-            <a:avLst/>
-          </a:prstGeom>
-          <a:solidFill>
-            <a:srgbClr val="010736"/>
-          </a:solidFill>
-          <a:ln w="12700">
-            <a:solidFill>
-              <a:srgbClr val="010736"/>
-            </a:solidFill>
-            <a:prstDash val="solid"/>
-          </a:ln>
-        </p:spPr>
-      </p:sp>
-      <p:pic>
-        <p:nvPicPr>
-          <p:cNvPr id="5" name="Image 0" descr="preencoded.png">    </p:cNvPr>
-          <p:cNvPicPr>
-            <a:picLocks noChangeAspect="1"/>
-          </p:cNvPicPr>
-          <p:nvPr/>
-        </p:nvPicPr>
-        <p:blipFill>
-          <a:blip r:embed="rId1"/>
-          <a:stretch>
-            <a:fillRect/>
-          </a:stretch>
-        </p:blipFill>
-        <p:spPr>
-          <a:xfrm>
-            <a:off x="1097280" y="1965960"/>
-            <a:ext cx="365760" cy="365760"/>
-          </a:xfrm>
-          <a:prstGeom prst="rect">
-            <a:avLst/>
-          </a:prstGeom>
-        </p:spPr>
-      </p:pic>
-      <p:sp>
-        <p:nvSpPr>
-          <p:cNvPr id="6" name="Text 3"/>
-          <p:cNvSpPr txBox="1"/>
-          <p:nvPr/>
-        </p:nvSpPr>
-        <p:spPr>
-          <a:xfrm>
-            <a:off x="914400" y="2697480"/>
-            <a:ext cx="3017520" cy="457200"/>
-          </a:xfrm>
-          <a:prstGeom prst="rect">
-            <a:avLst/>
-          </a:prstGeom>
-          <a:noFill/>
-          <a:ln/>
-        </p:spPr>
-        <p:txBody>
-          <a:bodyPr wrap="square" lIns="0" tIns="0" rIns="0" bIns="0" rtlCol="0" anchor="t"/>
-          <a:lstStyle/>
-          <a:p>
-            <a:pPr indent="0" marL="0">
-              <a:buNone/>
-            </a:pPr>
-            <a:r>
-              <a:rPr lang="en-US" sz="2200" b="1" dirty="0">
-                <a:solidFill>
-                  <a:srgbClr val="010736"/>
-                </a:solidFill>
-                <a:latin typeface="Cambria" pitchFamily="34" charset="0"/>
-                <a:ea typeface="Cambria" pitchFamily="34" charset="-122"/>
-                <a:cs typeface="Cambria" pitchFamily="34" charset="-120"/>
-              </a:rPr>
-              <a:t>Manipulação do DOM</a:t>
-            </a:r>
-            <a:endParaRPr lang="en-US" sz="2200" dirty="0"/>
-          </a:p>
-        </p:txBody>
-      </p:sp>
-      <p:sp>
-        <p:nvSpPr>
-          <p:cNvPr id="7" name="Text 4"/>
-          <p:cNvSpPr txBox="1"/>
-          <p:nvPr/>
-        </p:nvSpPr>
-        <p:spPr>
-          <a:xfrm>
-            <a:off x="914400" y="3291840"/>
-            <a:ext cx="3017520" cy="2651760"/>
-          </a:xfrm>
-          <a:prstGeom prst="rect">
-            <a:avLst/>
-          </a:prstGeom>
-          <a:noFill/>
-          <a:ln/>
-        </p:spPr>
-        <p:txBody>
-          <a:bodyPr wrap="square" lIns="0" tIns="0" rIns="0" bIns="0" rtlCol="0" anchor="t"/>
-          <a:lstStyle/>
-          <a:p>
-            <a:pPr marL="342900" indent="-342900">
-              <a:spcAft>
-                <a:spcPts val="1200"/>
-              </a:spcAft>
-              <a:buSzPct val="100000"/>
-              <a:buChar char="•"/>
-            </a:pPr>
-            <a:r>
-              <a:rPr lang="en-US" sz="1700" dirty="0">
-                <a:solidFill>
-                  <a:srgbClr val="0D1C42"/>
-                </a:solidFill>
-                <a:latin typeface="Calibri" pitchFamily="34" charset="0"/>
-                <a:ea typeface="Calibri" pitchFamily="34" charset="-122"/>
-                <a:cs typeface="Calibri" pitchFamily="34" charset="-120"/>
-              </a:rPr>
-              <a:t>Função h() cria os elementos</a:t>
-            </a:r>
-            <a:endParaRPr lang="en-US" sz="1700" dirty="0"/>
-          </a:p>
-          <a:p>
-            <a:pPr marL="342900" indent="-342900">
-              <a:spcAft>
-                <a:spcPts val="1200"/>
-              </a:spcAft>
-              <a:buSzPct val="100000"/>
-              <a:buChar char="•"/>
-            </a:pPr>
-            <a:r>
-              <a:rPr lang="en-US" sz="1700" dirty="0">
-                <a:solidFill>
-                  <a:srgbClr val="0D1C42"/>
-                </a:solidFill>
-                <a:latin typeface="Calibri" pitchFamily="34" charset="0"/>
-                <a:ea typeface="Calibri" pitchFamily="34" charset="-122"/>
-                <a:cs typeface="Calibri" pitchFamily="34" charset="-120"/>
-              </a:rPr>
-              <a:t>textContent evita injeção de HTML</a:t>
-            </a:r>
-            <a:endParaRPr lang="en-US" sz="1700" dirty="0"/>
-          </a:p>
-          <a:p>
-            <a:pPr marL="342900" indent="-342900">
-              <a:spcAft>
-                <a:spcPts val="1200"/>
-              </a:spcAft>
-              <a:buSzPct val="100000"/>
-              <a:buChar char="•"/>
-            </a:pPr>
-            <a:r>
-              <a:rPr lang="en-US" sz="1700" dirty="0">
-                <a:solidFill>
-                  <a:srgbClr val="0D1C42"/>
-                </a:solidFill>
-                <a:latin typeface="Calibri" pitchFamily="34" charset="0"/>
-                <a:ea typeface="Calibri" pitchFamily="34" charset="-122"/>
-                <a:cs typeface="Calibri" pitchFamily="34" charset="-120"/>
-              </a:rPr>
-              <a:t>replaceChildren redesenha chips e cards</a:t>
-            </a:r>
-            <a:endParaRPr lang="en-US" sz="1700" dirty="0"/>
-          </a:p>
-          <a:p>
-            <a:pPr marL="342900" indent="-342900">
-              <a:spcAft>
-                <a:spcPts val="1200"/>
-              </a:spcAft>
-              <a:buSzPct val="100000"/>
-              <a:buChar char="•"/>
-            </a:pPr>
-            <a:r>
-              <a:rPr lang="en-US" sz="1700" dirty="0">
-                <a:solidFill>
-                  <a:srgbClr val="0D1C42"/>
-                </a:solidFill>
-                <a:latin typeface="Calibri" pitchFamily="34" charset="0"/>
-                <a:ea typeface="Calibri" pitchFamily="34" charset="-122"/>
-                <a:cs typeface="Calibri" pitchFamily="34" charset="-120"/>
-              </a:rPr>
-              <a:t>Modal com o elemento &lt;dialog&gt;</a:t>
-            </a:r>
-            <a:endParaRPr lang="en-US" sz="1700" dirty="0"/>
-          </a:p>
-        </p:txBody>
-      </p:sp>
-      <p:sp>
-        <p:nvSpPr>
-          <p:cNvPr id="8" name="Shape 5"/>
-          <p:cNvSpPr/>
-          <p:nvPr/>
-        </p:nvSpPr>
-        <p:spPr>
-          <a:xfrm>
-            <a:off x="4343400" y="1554480"/>
-            <a:ext cx="3474720" cy="4526280"/>
-          </a:xfrm>
-          <a:prstGeom prst="roundRect">
-            <a:avLst>
-              <a:gd name="adj" fmla="val 3158"/>
-            </a:avLst>
-          </a:prstGeom>
-          <a:solidFill>
-            <a:srgbClr val="FFFAEA"/>
-          </a:solidFill>
-          <a:ln w="12700">
-            <a:solidFill>
-              <a:srgbClr val="FFFAEA"/>
-            </a:solidFill>
-            <a:prstDash val="solid"/>
-          </a:ln>
-          <a:effectLst>
-            <a:outerShdw sx="100000" sy="100000" kx="0" ky="0" algn="bl" rotWithShape="0" blurRad="101600" dist="25400" dir="5400000">
-              <a:srgbClr val="000000">
-                <a:alpha val="15000"/>
-              </a:srgbClr>
-            </a:outerShdw>
-          </a:effectLst>
-        </p:spPr>
-      </p:sp>
-      <p:sp>
-        <p:nvSpPr>
-          <p:cNvPr id="9" name="Shape 6"/>
-          <p:cNvSpPr/>
-          <p:nvPr/>
-        </p:nvSpPr>
-        <p:spPr>
-          <a:xfrm>
-            <a:off x="4617720" y="1783080"/>
-            <a:ext cx="731520" cy="731520"/>
-          </a:xfrm>
-          <a:prstGeom prst="ellipse">
-            <a:avLst/>
-          </a:prstGeom>
-          <a:solidFill>
-            <a:srgbClr val="010736"/>
-          </a:solidFill>
-          <a:ln w="12700">
-            <a:solidFill>
-              <a:srgbClr val="010736"/>
-            </a:solidFill>
-            <a:prstDash val="solid"/>
-          </a:ln>
-        </p:spPr>
-      </p:sp>
-      <p:pic>
-        <p:nvPicPr>
-          <p:cNvPr id="10" name="Image 1" descr="preencoded.png">    </p:cNvPr>
-          <p:cNvPicPr>
-            <a:picLocks noChangeAspect="1"/>
-          </p:cNvPicPr>
-          <p:nvPr/>
-        </p:nvPicPr>
-        <p:blipFill>
-          <a:blip r:embed="rId2"/>
-          <a:stretch>
-            <a:fillRect/>
-          </a:stretch>
-        </p:blipFill>
-        <p:spPr>
-          <a:xfrm>
-            <a:off x="4800600" y="1965960"/>
-            <a:ext cx="365760" cy="365760"/>
-          </a:xfrm>
-          <a:prstGeom prst="rect">
-            <a:avLst/>
-          </a:prstGeom>
-        </p:spPr>
-      </p:pic>
-      <p:sp>
-        <p:nvSpPr>
-          <p:cNvPr id="11" name="Text 7"/>
-          <p:cNvSpPr txBox="1"/>
-          <p:nvPr/>
-        </p:nvSpPr>
-        <p:spPr>
-          <a:xfrm>
-            <a:off x="4617720" y="2697480"/>
-            <a:ext cx="3017520" cy="457200"/>
-          </a:xfrm>
-          <a:prstGeom prst="rect">
-            <a:avLst/>
-          </a:prstGeom>
-          <a:noFill/>
-          <a:ln/>
-        </p:spPr>
-        <p:txBody>
-          <a:bodyPr wrap="square" lIns="0" tIns="0" rIns="0" bIns="0" rtlCol="0" anchor="t"/>
-          <a:lstStyle/>
-          <a:p>
-            <a:pPr indent="0" marL="0">
-              <a:buNone/>
-            </a:pPr>
-            <a:r>
-              <a:rPr lang="en-US" sz="2200" b="1" dirty="0">
-                <a:solidFill>
-                  <a:srgbClr val="010736"/>
-                </a:solidFill>
-                <a:latin typeface="Cambria" pitchFamily="34" charset="0"/>
-                <a:ea typeface="Cambria" pitchFamily="34" charset="-122"/>
-                <a:cs typeface="Cambria" pitchFamily="34" charset="-120"/>
-              </a:rPr>
-              <a:t>Eventos</a:t>
-            </a:r>
-            <a:endParaRPr lang="en-US" sz="2200" dirty="0"/>
-          </a:p>
-        </p:txBody>
-      </p:sp>
-      <p:sp>
-        <p:nvSpPr>
-          <p:cNvPr id="12" name="Text 8"/>
-          <p:cNvSpPr txBox="1"/>
-          <p:nvPr/>
-        </p:nvSpPr>
-        <p:spPr>
-          <a:xfrm>
-            <a:off x="4617720" y="3291840"/>
-            <a:ext cx="3017520" cy="2651760"/>
-          </a:xfrm>
-          <a:prstGeom prst="rect">
-            <a:avLst/>
-          </a:prstGeom>
-          <a:noFill/>
-          <a:ln/>
-        </p:spPr>
-        <p:txBody>
-          <a:bodyPr wrap="square" lIns="0" tIns="0" rIns="0" bIns="0" rtlCol="0" anchor="t"/>
-          <a:lstStyle/>
-          <a:p>
-            <a:pPr marL="342900" indent="-342900">
-              <a:spcAft>
-                <a:spcPts val="1200"/>
-              </a:spcAft>
-              <a:buSzPct val="100000"/>
-              <a:buChar char="•"/>
-            </a:pPr>
-            <a:r>
-              <a:rPr lang="en-US" sz="1700" dirty="0">
-                <a:solidFill>
-                  <a:srgbClr val="0D1C42"/>
-                </a:solidFill>
-                <a:latin typeface="Calibri" pitchFamily="34" charset="0"/>
-                <a:ea typeface="Calibri" pitchFamily="34" charset="-122"/>
-                <a:cs typeface="Calibri" pitchFamily="34" charset="-120"/>
-              </a:rPr>
-              <a:t>click: adicionar, remover e ver receita</a:t>
-            </a:r>
-            <a:endParaRPr lang="en-US" sz="1700" dirty="0"/>
-          </a:p>
-          <a:p>
-            <a:pPr marL="342900" indent="-342900">
-              <a:spcAft>
-                <a:spcPts val="1200"/>
-              </a:spcAft>
-              <a:buSzPct val="100000"/>
-              <a:buChar char="•"/>
-            </a:pPr>
-            <a:r>
-              <a:rPr lang="en-US" sz="1700" dirty="0">
-                <a:solidFill>
-                  <a:srgbClr val="0D1C42"/>
-                </a:solidFill>
-                <a:latin typeface="Calibri" pitchFamily="34" charset="0"/>
-                <a:ea typeface="Calibri" pitchFamily="34" charset="-122"/>
-                <a:cs typeface="Calibri" pitchFamily="34" charset="-120"/>
-              </a:rPr>
-              <a:t>keydown: Enter adiciona o ingrediente</a:t>
-            </a:r>
-            <a:endParaRPr lang="en-US" sz="1700" dirty="0"/>
-          </a:p>
-          <a:p>
-            <a:pPr marL="342900" indent="-342900">
-              <a:spcAft>
-                <a:spcPts val="1200"/>
-              </a:spcAft>
-              <a:buSzPct val="100000"/>
-              <a:buChar char="•"/>
-            </a:pPr>
-            <a:r>
-              <a:rPr lang="en-US" sz="1700" dirty="0">
-                <a:solidFill>
-                  <a:srgbClr val="0D1C42"/>
-                </a:solidFill>
-                <a:latin typeface="Calibri" pitchFamily="34" charset="0"/>
-                <a:ea typeface="Calibri" pitchFamily="34" charset="-122"/>
-                <a:cs typeface="Calibri" pitchFamily="34" charset="-120"/>
-              </a:rPr>
-              <a:t>submit: dispara a busca</a:t>
-            </a:r>
-            <a:endParaRPr lang="en-US" sz="1700" dirty="0"/>
-          </a:p>
-          <a:p>
-            <a:pPr marL="342900" indent="-342900">
-              <a:spcAft>
-                <a:spcPts val="1200"/>
-              </a:spcAft>
-              <a:buSzPct val="100000"/>
-              <a:buChar char="•"/>
-            </a:pPr>
-            <a:r>
-              <a:rPr lang="en-US" sz="1700" dirty="0">
-                <a:solidFill>
-                  <a:srgbClr val="0D1C42"/>
-                </a:solidFill>
-                <a:latin typeface="Calibri" pitchFamily="34" charset="0"/>
-                <a:ea typeface="Calibri" pitchFamily="34" charset="-122"/>
-                <a:cs typeface="Calibri" pitchFamily="34" charset="-120"/>
-              </a:rPr>
-              <a:t>online/offline: avisa queda de conexão</a:t>
-            </a:r>
-            <a:endParaRPr lang="en-US" sz="1700" dirty="0"/>
-          </a:p>
-        </p:txBody>
-      </p:sp>
-      <p:sp>
-        <p:nvSpPr>
-          <p:cNvPr id="13" name="Shape 9"/>
-          <p:cNvSpPr/>
-          <p:nvPr/>
-        </p:nvSpPr>
-        <p:spPr>
-          <a:xfrm>
-            <a:off x="8046720" y="1554480"/>
-            <a:ext cx="3474720" cy="4526280"/>
-          </a:xfrm>
-          <a:prstGeom prst="roundRect">
-            <a:avLst>
-              <a:gd name="adj" fmla="val 3158"/>
-            </a:avLst>
-          </a:prstGeom>
-          <a:solidFill>
-            <a:srgbClr val="FFFAEA"/>
-          </a:solidFill>
-          <a:ln w="12700">
-            <a:solidFill>
-              <a:srgbClr val="FFFAEA"/>
-            </a:solidFill>
-            <a:prstDash val="solid"/>
-          </a:ln>
-          <a:effectLst>
-            <a:outerShdw sx="100000" sy="100000" kx="0" ky="0" algn="bl" rotWithShape="0" blurRad="101600" dist="25400" dir="5400000">
-              <a:srgbClr val="000000">
-                <a:alpha val="15000"/>
-              </a:srgbClr>
-            </a:outerShdw>
-          </a:effectLst>
-        </p:spPr>
-      </p:sp>
-      <p:sp>
-        <p:nvSpPr>
-          <p:cNvPr id="14" name="Shape 10"/>
-          <p:cNvSpPr/>
-          <p:nvPr/>
-        </p:nvSpPr>
-        <p:spPr>
-          <a:xfrm>
-            <a:off x="8321040" y="1783080"/>
-            <a:ext cx="731520" cy="731520"/>
-          </a:xfrm>
-          <a:prstGeom prst="ellipse">
-            <a:avLst/>
-          </a:prstGeom>
-          <a:solidFill>
-            <a:srgbClr val="010736"/>
-          </a:solidFill>
-          <a:ln w="12700">
-            <a:solidFill>
-              <a:srgbClr val="010736"/>
-            </a:solidFill>
-            <a:prstDash val="solid"/>
-          </a:ln>
-        </p:spPr>
-      </p:sp>
-      <p:pic>
-        <p:nvPicPr>
-          <p:cNvPr id="15" name="Image 2" descr="preencoded.png">    </p:cNvPr>
-          <p:cNvPicPr>
-            <a:picLocks noChangeAspect="1"/>
-          </p:cNvPicPr>
-          <p:nvPr/>
-        </p:nvPicPr>
-        <p:blipFill>
-          <a:blip r:embed="rId3"/>
-          <a:stretch>
-            <a:fillRect/>
-          </a:stretch>
-        </p:blipFill>
-        <p:spPr>
-          <a:xfrm>
-            <a:off x="8503920" y="1965960"/>
-            <a:ext cx="365760" cy="365760"/>
-          </a:xfrm>
-          <a:prstGeom prst="rect">
-            <a:avLst/>
-          </a:prstGeom>
-        </p:spPr>
-      </p:pic>
-      <p:sp>
-        <p:nvSpPr>
-          <p:cNvPr id="16" name="Text 11"/>
-          <p:cNvSpPr txBox="1"/>
-          <p:nvPr/>
-        </p:nvSpPr>
-        <p:spPr>
-          <a:xfrm>
-            <a:off x="8321040" y="2697480"/>
-            <a:ext cx="3017520" cy="457200"/>
-          </a:xfrm>
-          <a:prstGeom prst="rect">
-            <a:avLst/>
-          </a:prstGeom>
-          <a:noFill/>
-          <a:ln/>
-        </p:spPr>
-        <p:txBody>
-          <a:bodyPr wrap="square" lIns="0" tIns="0" rIns="0" bIns="0" rtlCol="0" anchor="t"/>
-          <a:lstStyle/>
-          <a:p>
-            <a:pPr indent="0" marL="0">
-              <a:buNone/>
-            </a:pPr>
-            <a:r>
-              <a:rPr lang="en-US" sz="2200" b="1" dirty="0">
-                <a:solidFill>
-                  <a:srgbClr val="010736"/>
-                </a:solidFill>
-                <a:latin typeface="Cambria" pitchFamily="34" charset="0"/>
-                <a:ea typeface="Cambria" pitchFamily="34" charset="-122"/>
-                <a:cs typeface="Cambria" pitchFamily="34" charset="-120"/>
-              </a:rPr>
-              <a:t>Escopo</a:t>
-            </a:r>
-            <a:endParaRPr lang="en-US" sz="2200" dirty="0"/>
-          </a:p>
-        </p:txBody>
-      </p:sp>
-      <p:sp>
-        <p:nvSpPr>
-          <p:cNvPr id="17" name="Text 12"/>
-          <p:cNvSpPr txBox="1"/>
-          <p:nvPr/>
-        </p:nvSpPr>
-        <p:spPr>
-          <a:xfrm>
-            <a:off x="8321040" y="3291840"/>
-            <a:ext cx="3017520" cy="2651760"/>
-          </a:xfrm>
-          <a:prstGeom prst="rect">
-            <a:avLst/>
-          </a:prstGeom>
-          <a:noFill/>
-          <a:ln/>
-        </p:spPr>
-        <p:txBody>
-          <a:bodyPr wrap="square" lIns="0" tIns="0" rIns="0" bIns="0" rtlCol="0" anchor="t"/>
-          <a:lstStyle/>
-          <a:p>
-            <a:pPr marL="342900" indent="-342900">
-              <a:spcAft>
-                <a:spcPts val="1200"/>
-              </a:spcAft>
-              <a:buSzPct val="100000"/>
-              <a:buChar char="•"/>
-            </a:pPr>
-            <a:r>
-              <a:rPr lang="en-US" sz="1700" dirty="0">
-                <a:solidFill>
-                  <a:srgbClr val="0D1C42"/>
-                </a:solidFill>
-                <a:latin typeface="Calibri" pitchFamily="34" charset="0"/>
-                <a:ea typeface="Calibri" pitchFamily="34" charset="-122"/>
-                <a:cs typeface="Calibri" pitchFamily="34" charset="-120"/>
-              </a:rPr>
-              <a:t>state e el declarados uma vez, no topo</a:t>
-            </a:r>
-            <a:endParaRPr lang="en-US" sz="1700" dirty="0"/>
-          </a:p>
-          <a:p>
-            <a:pPr marL="342900" indent="-342900">
-              <a:spcAft>
-                <a:spcPts val="1200"/>
-              </a:spcAft>
-              <a:buSzPct val="100000"/>
-              <a:buChar char="•"/>
-            </a:pPr>
-            <a:r>
-              <a:rPr lang="en-US" sz="1700" dirty="0">
-                <a:solidFill>
-                  <a:srgbClr val="0D1C42"/>
-                </a:solidFill>
-                <a:latin typeface="Calibri" pitchFamily="34" charset="0"/>
-                <a:ea typeface="Calibri" pitchFamily="34" charset="-122"/>
-                <a:cs typeface="Calibri" pitchFamily="34" charset="-120"/>
-              </a:rPr>
-              <a:t>Funções pequenas, um trabalho cada</a:t>
-            </a:r>
-            <a:endParaRPr lang="en-US" sz="1700" dirty="0"/>
-          </a:p>
-          <a:p>
-            <a:pPr marL="342900" indent="-342900">
-              <a:spcAft>
-                <a:spcPts val="1200"/>
-              </a:spcAft>
-              <a:buSzPct val="100000"/>
-              <a:buChar char="•"/>
-            </a:pPr>
-            <a:r>
-              <a:rPr lang="en-US" sz="1700" dirty="0">
-                <a:solidFill>
-                  <a:srgbClr val="0D1C42"/>
-                </a:solidFill>
-                <a:latin typeface="Calibri" pitchFamily="34" charset="0"/>
-                <a:ea typeface="Calibri" pitchFamily="34" charset="-122"/>
-                <a:cs typeface="Calibri" pitchFamily="34" charset="-120"/>
-              </a:rPr>
-              <a:t>requestId ignora respostas antigas</a:t>
-            </a:r>
-            <a:endParaRPr lang="en-US" sz="1700" dirty="0"/>
-          </a:p>
-          <a:p>
-            <a:pPr marL="342900" indent="-342900">
-              <a:spcAft>
-                <a:spcPts val="1200"/>
-              </a:spcAft>
-              <a:buSzPct val="100000"/>
-              <a:buChar char="•"/>
-            </a:pPr>
-            <a:r>
-              <a:rPr lang="en-US" sz="1700" dirty="0">
-                <a:solidFill>
-                  <a:srgbClr val="0D1C42"/>
-                </a:solidFill>
-                <a:latin typeface="Calibri" pitchFamily="34" charset="0"/>
-                <a:ea typeface="Calibri" pitchFamily="34" charset="-122"/>
-                <a:cs typeface="Calibri" pitchFamily="34" charset="-120"/>
-              </a:rPr>
-              <a:t>"use strict" evita variáveis acidentais</a:t>
-            </a:r>
-            <a:endParaRPr lang="en-US" sz="1700" dirty="0"/>
-          </a:p>
-        </p:txBody>
-      </p:sp>
-    </p:spTree>
-  </p:cSld>
-  <p:clrMapOvr>
-    <a:masterClrMapping/>
-  </p:clrMapOvr>
-</p:sld>
-</file>
-
-<file path=ppt/slides/slide7.xml><?xml version="1.0" encoding="utf-8"?>
-<p:sld xmlns:a="http://schemas.openxmlformats.org/drawingml/2006/main" xmlns:r="http://schemas.openxmlformats.org/officeDocument/2006/relationships" xmlns:p="http://schemas.openxmlformats.org/presentationml/2006/main">
-  <p:cSld name="Slide 7">
-    <p:bg>
-      <p:bgPr>
-        <a:solidFill>
-          <a:srgbClr val="FCF1D0"/>
-        </a:solidFill>
-      </p:bgPr>
-    </p:bg>
-    <p:spTree>
-      <p:nvGrpSpPr>
-        <p:cNvPr id="1" name=""/>
-        <p:cNvGrpSpPr/>
-        <p:nvPr/>
-      </p:nvGrpSpPr>
-      <p:grpSpPr>
-        <a:xfrm>
-          <a:off x="0" y="0"/>
-          <a:ext cx="0" cy="0"/>
-          <a:chOff x="0" y="0"/>
-          <a:chExt cx="0" cy="0"/>
-        </a:xfrm>
-      </p:grpSpPr>
-      <p:sp>
-        <p:nvSpPr>
-          <p:cNvPr id="2" name="Text 0"/>
-          <p:cNvSpPr txBox="1"/>
-          <p:nvPr/>
-        </p:nvSpPr>
-        <p:spPr>
-          <a:xfrm>
-            <a:off x="640080" y="411480"/>
-            <a:ext cx="10881360" cy="822960"/>
-          </a:xfrm>
-          <a:prstGeom prst="rect">
-            <a:avLst/>
-          </a:prstGeom>
-          <a:noFill/>
-          <a:ln/>
-        </p:spPr>
-        <p:txBody>
-          <a:bodyPr wrap="square" lIns="0" tIns="0" rIns="0" bIns="0" rtlCol="0" anchor="ctr"/>
-          <a:lstStyle/>
-          <a:p>
-            <a:pPr indent="0" marL="0">
-              <a:buNone/>
-            </a:pPr>
-            <a:r>
-              <a:rPr lang="en-US" sz="3800" b="1" dirty="0">
-                <a:solidFill>
-                  <a:srgbClr val="010736"/>
-                </a:solidFill>
-                <a:latin typeface="Cambria" pitchFamily="34" charset="0"/>
-                <a:ea typeface="Cambria" pitchFamily="34" charset="-122"/>
-                <a:cs typeface="Cambria" pitchFamily="34" charset="-120"/>
-              </a:rPr>
               <a:t>Repositório e documentação</a:t>
             </a:r>
             <a:endParaRPr lang="en-US" sz="3800" dirty="0"/>
@@ -6634,9 +5331,9 @@
 </p:sld>
 </file>
 
-<file path=ppt/slides/slide8.xml><?xml version="1.0" encoding="utf-8"?>
+<file path=ppt/slides/slide7.xml><?xml version="1.0" encoding="utf-8"?>
 <p:sld xmlns:a="http://schemas.openxmlformats.org/drawingml/2006/main" xmlns:r="http://schemas.openxmlformats.org/officeDocument/2006/relationships" xmlns:p="http://schemas.openxmlformats.org/presentationml/2006/main">
-  <p:cSld name="Slide 8">
+  <p:cSld name="Slide 7">
     <p:bg>
       <p:bgPr>
         <a:solidFill>
